--- a/examples/showcase/decks/quarterly-review/q3-비즈니스-리뷰.pptx
+++ b/examples/showcase/decks/quarterly-review/q3-비즈니스-리뷰.pptx
@@ -5,7 +5,7 @@
     <p:sldMasterId id="2147483648" r:id="rId1"/>
   </p:sldMasterIdLst>
   <p:notesMasterIdLst>
-    <p:notesMasterId r:id="rId9"/>
+    <p:notesMasterId r:id="rId10"/>
   </p:notesMasterIdLst>
   <p:sldIdLst>
     <p:sldId id="256" r:id="rId2"/>
@@ -14,6 +14,7 @@
     <p:sldId id="259" r:id="rId5"/>
     <p:sldId id="260" r:id="rId6"/>
     <p:sldId id="261" r:id="rId7"/>
+    <p:sldId id="262" r:id="rId8"/>
   </p:sldIdLst>
   <p:sldSz cx="12192000" cy="6858000"/>
   <p:notesSz cx="6858000" cy="9144000"/>
@@ -158,6 +159,64 @@
 </p:notes>
 </file>
 
+<file path=ppt/notesSlides/notesSlide2.xml><?xml version="1.0" encoding="utf-8"?>
+<p:notes xmlns:a="http://schemas.openxmlformats.org/drawingml/2006/main" xmlns:r="http://schemas.openxmlformats.org/officeDocument/2006/relationships" xmlns:p="http://schemas.openxmlformats.org/presentationml/2006/main">
+  <p:cSld name="agenda">
+    <p:spTree>
+      <p:nvGrpSpPr>
+        <p:cNvPr id="1" name=""/>
+        <p:cNvGrpSpPr/>
+        <p:nvPr/>
+      </p:nvGrpSpPr>
+      <p:grpSpPr>
+        <a:xfrm>
+          <a:off x="0" y="0"/>
+          <a:ext cx="0" cy="0"/>
+          <a:chOff x="0" y="0"/>
+          <a:chExt cx="0" cy="0"/>
+        </a:xfrm>
+      </p:grpSpPr>
+      <p:sp>
+        <p:nvSpPr>
+          <p:cNvPr id="2" name="Slide Image Placeholder 1"/>
+          <p:cNvSpPr>
+            <a:spLocks noGrp="1" noRot="1" noChangeAspect="1"/>
+          </p:cNvSpPr>
+          <p:nvPr>
+            <p:ph type="sldImg"/>
+          </p:nvPr>
+        </p:nvSpPr>
+        <p:spPr/>
+      </p:sp>
+      <p:sp>
+        <p:nvSpPr>
+          <p:cNvPr id="3" name="Notes Placeholder 2"/>
+          <p:cNvSpPr>
+            <a:spLocks noGrp="1"/>
+          </p:cNvSpPr>
+          <p:nvPr>
+            <p:ph type="body" idx="1"/>
+          </p:nvPr>
+        </p:nvSpPr>
+        <p:spPr/>
+        <p:txBody>
+          <a:bodyPr/>
+          <a:lstStyle/>
+          <a:p>
+            <a:r>
+              <a:t>앞의 셋은 돌아보기, 마지막 하나가 오늘 결정할 것이다.</a:t>
+            </a:r>
+          </a:p>
+        </p:txBody>
+      </p:sp>
+    </p:spTree>
+  </p:cSld>
+  <p:clrMapOvr>
+    <a:masterClrMapping/>
+  </p:clrMapOvr>
+</p:notes>
+</file>
+
 <file path=ppt/notesSlides/notesSlide3.xml><?xml version="1.0" encoding="utf-8"?>
 <p:notes xmlns:a="http://schemas.openxmlformats.org/drawingml/2006/main" xmlns:r="http://schemas.openxmlformats.org/officeDocument/2006/relationships" xmlns:p="http://schemas.openxmlformats.org/presentationml/2006/main">
   <p:cSld name="kpis">
@@ -203,7 +262,123 @@
           <a:lstStyle/>
           <a:p>
             <a:r>
-              <a:t>매출은 목표 대비 108%.</a:t>
+              <a:t>매출은 목표 대비 108%. 평점 상승은 결제 오류 수정 이후다.</a:t>
+            </a:r>
+          </a:p>
+        </p:txBody>
+      </p:sp>
+    </p:spTree>
+  </p:cSld>
+  <p:clrMapOvr>
+    <a:masterClrMapping/>
+  </p:clrMapOvr>
+</p:notes>
+</file>
+
+<file path=ppt/notesSlides/notesSlide4.xml><?xml version="1.0" encoding="utf-8"?>
+<p:notes xmlns:a="http://schemas.openxmlformats.org/drawingml/2006/main" xmlns:r="http://schemas.openxmlformats.org/officeDocument/2006/relationships" xmlns:p="http://schemas.openxmlformats.org/presentationml/2006/main">
+  <p:cSld name="table">
+    <p:spTree>
+      <p:nvGrpSpPr>
+        <p:cNvPr id="1" name=""/>
+        <p:cNvGrpSpPr/>
+        <p:nvPr/>
+      </p:nvGrpSpPr>
+      <p:grpSpPr>
+        <a:xfrm>
+          <a:off x="0" y="0"/>
+          <a:ext cx="0" cy="0"/>
+          <a:chOff x="0" y="0"/>
+          <a:chExt cx="0" cy="0"/>
+        </a:xfrm>
+      </p:grpSpPr>
+      <p:sp>
+        <p:nvSpPr>
+          <p:cNvPr id="2" name="Slide Image Placeholder 1"/>
+          <p:cNvSpPr>
+            <a:spLocks noGrp="1" noRot="1" noChangeAspect="1"/>
+          </p:cNvSpPr>
+          <p:nvPr>
+            <p:ph type="sldImg"/>
+          </p:nvPr>
+        </p:nvSpPr>
+        <p:spPr/>
+      </p:sp>
+      <p:sp>
+        <p:nvSpPr>
+          <p:cNvPr id="3" name="Notes Placeholder 2"/>
+          <p:cNvSpPr>
+            <a:spLocks noGrp="1"/>
+          </p:cNvSpPr>
+          <p:nvPr>
+            <p:ph type="body" idx="1"/>
+          </p:nvPr>
+        </p:nvSpPr>
+        <p:spPr/>
+        <p:txBody>
+          <a:bodyPr/>
+          <a:lstStyle/>
+          <a:p>
+            <a:r>
+              <a:t>디스플레이 광고 예산은 Q4에 추천 보상으로 옮긴다 — 다음 장의 근거다.</a:t>
+            </a:r>
+          </a:p>
+        </p:txBody>
+      </p:sp>
+    </p:spTree>
+  </p:cSld>
+  <p:clrMapOvr>
+    <a:masterClrMapping/>
+  </p:clrMapOvr>
+</p:notes>
+</file>
+
+<file path=ppt/notesSlides/notesSlide6.xml><?xml version="1.0" encoding="utf-8"?>
+<p:notes xmlns:a="http://schemas.openxmlformats.org/drawingml/2006/main" xmlns:r="http://schemas.openxmlformats.org/officeDocument/2006/relationships" xmlns:p="http://schemas.openxmlformats.org/presentationml/2006/main">
+  <p:cSld name="plan">
+    <p:spTree>
+      <p:nvGrpSpPr>
+        <p:cNvPr id="1" name=""/>
+        <p:cNvGrpSpPr/>
+        <p:nvPr/>
+      </p:nvGrpSpPr>
+      <p:grpSpPr>
+        <a:xfrm>
+          <a:off x="0" y="0"/>
+          <a:ext cx="0" cy="0"/>
+          <a:chOff x="0" y="0"/>
+          <a:chExt cx="0" cy="0"/>
+        </a:xfrm>
+      </p:grpSpPr>
+      <p:sp>
+        <p:nvSpPr>
+          <p:cNvPr id="2" name="Slide Image Placeholder 1"/>
+          <p:cNvSpPr>
+            <a:spLocks noGrp="1" noRot="1" noChangeAspect="1"/>
+          </p:cNvSpPr>
+          <p:nvPr>
+            <p:ph type="sldImg"/>
+          </p:nvPr>
+        </p:nvSpPr>
+        <p:spPr/>
+      </p:sp>
+      <p:sp>
+        <p:nvSpPr>
+          <p:cNvPr id="3" name="Notes Placeholder 2"/>
+          <p:cNvSpPr>
+            <a:spLocks noGrp="1"/>
+          </p:cNvSpPr>
+          <p:nvPr>
+            <p:ph type="body" idx="1"/>
+          </p:nvPr>
+        </p:nvSpPr>
+        <p:spPr/>
+        <p:txBody>
+          <a:bodyPr/>
+          <a:lstStyle/>
+          <a:p>
+            <a:r>
+              <a:t>오늘 결정할 것은 오른쪽 첫 줄 하나다.</a:t>
             </a:r>
           </a:p>
         </p:txBody>
@@ -241,6 +416,88 @@
 </p:sldLayout>
 </file>
 
+<file path=ppt/slideLayouts/slideLayout2.xml><?xml version="1.0" encoding="utf-8"?>
+<p:sldLayout xmlns:a="http://schemas.openxmlformats.org/drawingml/2006/main" xmlns:r="http://schemas.openxmlformats.org/officeDocument/2006/relationships" xmlns:p="http://schemas.openxmlformats.org/presentationml/2006/main" type="cust" preserve="1">
+  <p:cSld name="two-column">
+    <p:spTree>
+      <p:nvGrpSpPr>
+        <p:cNvPr id="1" name=""/>
+        <p:cNvGrpSpPr/>
+        <p:nvPr/>
+      </p:nvGrpSpPr>
+      <p:grpSpPr>
+        <a:xfrm>
+          <a:off x="0" y="0"/>
+          <a:ext cx="0" cy="0"/>
+          <a:chOff x="0" y="0"/>
+          <a:chExt cx="0" cy="0"/>
+        </a:xfrm>
+      </p:grpSpPr>
+      <p:sp>
+        <p:nvSpPr>
+          <p:cNvPr id="2" name="title"/>
+          <p:cNvSpPr>
+            <a:spLocks noGrp="1"/>
+          </p:cNvSpPr>
+          <p:nvPr>
+            <p:ph type="title"/>
+          </p:nvPr>
+        </p:nvSpPr>
+        <p:spPr/>
+        <p:txBody>
+          <a:bodyPr/>
+          <a:lstStyle/>
+          <a:p>
+            <a:endParaRPr/>
+          </a:p>
+        </p:txBody>
+      </p:sp>
+      <p:sp>
+        <p:nvSpPr>
+          <p:cNvPr id="3" name="left"/>
+          <p:cNvSpPr>
+            <a:spLocks noGrp="1"/>
+          </p:cNvSpPr>
+          <p:nvPr>
+            <p:ph type="body" idx="1"/>
+          </p:nvPr>
+        </p:nvSpPr>
+        <p:spPr/>
+        <p:txBody>
+          <a:bodyPr/>
+          <a:lstStyle/>
+          <a:p>
+            <a:endParaRPr/>
+          </a:p>
+        </p:txBody>
+      </p:sp>
+      <p:sp>
+        <p:nvSpPr>
+          <p:cNvPr id="4" name="right"/>
+          <p:cNvSpPr>
+            <a:spLocks noGrp="1"/>
+          </p:cNvSpPr>
+          <p:nvPr>
+            <p:ph type="body" idx="2"/>
+          </p:nvPr>
+        </p:nvSpPr>
+        <p:spPr/>
+        <p:txBody>
+          <a:bodyPr/>
+          <a:lstStyle/>
+          <a:p>
+            <a:endParaRPr/>
+          </a:p>
+        </p:txBody>
+      </p:sp>
+    </p:spTree>
+  </p:cSld>
+  <p:clrMapOvr>
+    <a:masterClrMapping/>
+  </p:clrMapOvr>
+</p:sldLayout>
+</file>
+
 <file path=ppt/slideMasters/slideMaster1.xml><?xml version="1.0" encoding="utf-8"?>
 <p:sldMaster xmlns:a="http://schemas.openxmlformats.org/drawingml/2006/main" xmlns:r="http://schemas.openxmlformats.org/officeDocument/2006/relationships" xmlns:p="http://schemas.openxmlformats.org/presentationml/2006/main">
   <p:cSld>
@@ -263,12 +520,80 @@
           <a:chExt cx="0" cy="0"/>
         </a:xfrm>
       </p:grpSpPr>
+      <p:sp>
+        <p:nvSpPr>
+          <p:cNvPr id="2" name="Title Placeholder 1"/>
+          <p:cNvSpPr>
+            <a:spLocks noGrp="1"/>
+          </p:cNvSpPr>
+          <p:nvPr>
+            <p:ph type="title"/>
+          </p:nvPr>
+        </p:nvSpPr>
+        <p:spPr>
+          <a:xfrm>
+            <a:off x="457200" y="274320"/>
+            <a:ext cx="11277600" cy="1143000"/>
+          </a:xfrm>
+          <a:prstGeom prst="rect">
+            <a:avLst/>
+          </a:prstGeom>
+        </p:spPr>
+        <p:txBody>
+          <a:bodyPr/>
+          <a:lstStyle/>
+          <a:p>
+            <a:endParaRPr/>
+          </a:p>
+        </p:txBody>
+      </p:sp>
+      <p:sp>
+        <p:nvSpPr>
+          <p:cNvPr id="3" name="Body Placeholder 2"/>
+          <p:cNvSpPr>
+            <a:spLocks noGrp="1"/>
+          </p:cNvSpPr>
+          <p:nvPr>
+            <p:ph type="body" idx="1"/>
+          </p:nvPr>
+        </p:nvSpPr>
+        <p:spPr>
+          <a:xfrm>
+            <a:off x="457200" y="1600200"/>
+            <a:ext cx="11277600" cy="4800600"/>
+          </a:xfrm>
+          <a:prstGeom prst="rect">
+            <a:avLst/>
+          </a:prstGeom>
+        </p:spPr>
+        <p:txBody>
+          <a:bodyPr/>
+          <a:lstStyle/>
+          <a:p>
+            <a:endParaRPr/>
+          </a:p>
+        </p:txBody>
+      </p:sp>
     </p:spTree>
   </p:cSld>
   <p:clrMap bg1="lt1" tx1="dk1" bg2="lt2" tx2="dk2" accent1="accent1" accent2="accent2" accent3="accent3" accent4="accent4" accent5="accent5" accent6="accent6" hlink="hlink" folHlink="folHlink"/>
   <p:sldLayoutIdLst>
     <p:sldLayoutId id="2147483649" r:id="rId1"/>
+    <p:sldLayoutId id="2147483650" r:id="rId3"/>
   </p:sldLayoutIdLst>
+  <p:txStyles>
+    <p:titleStyle>
+      <a:lvl1pPr algn="l">
+        <a:defRPr sz="4400"/>
+      </a:lvl1pPr>
+    </p:titleStyle>
+    <p:bodyStyle>
+      <a:lvl1pPr>
+        <a:defRPr sz="2400"/>
+      </a:lvl1pPr>
+    </p:bodyStyle>
+    <p:otherStyle/>
+  </p:txStyles>
 </p:sldMaster>
 </file>
 
@@ -297,7 +622,7 @@
         </p:nvSpPr>
         <p:spPr>
           <a:xfrm>
-            <a:off x="609600" y="2589014"/>
+            <a:off x="609600" y="2495699"/>
             <a:ext cx="10972800" cy="239911"/>
           </a:xfrm>
           <a:prstGeom prst="rect">
@@ -340,8 +665,8 @@
         </p:nvSpPr>
         <p:spPr>
           <a:xfrm>
-            <a:off x="609600" y="3057525"/>
-            <a:ext cx="10972800" cy="639961"/>
+            <a:off x="609600" y="2964210"/>
+            <a:ext cx="10972800" cy="822871"/>
           </a:xfrm>
           <a:prstGeom prst="rect">
             <a:avLst/>
@@ -359,11 +684,11 @@
           <a:p>
             <a:pPr algn="ctr">
               <a:lnSpc>
-                <a:spcPts val="5040"/>
-              </a:lnSpc>
-            </a:pPr>
-            <a:r>
-              <a:rPr sz="4200" b="1">
+                <a:spcPts val="6480"/>
+              </a:lnSpc>
+            </a:pPr>
+            <a:r>
+              <a:rPr sz="5400" b="1">
                 <a:gradFill>
                   <a:gsLst>
                     <a:gs pos="0">
@@ -391,8 +716,8 @@
         </p:nvSpPr>
         <p:spPr>
           <a:xfrm>
-            <a:off x="609600" y="3926086"/>
-            <a:ext cx="10972800" cy="342900"/>
+            <a:off x="609600" y="4015680"/>
+            <a:ext cx="10972800" cy="346621"/>
           </a:xfrm>
           <a:prstGeom prst="rect">
             <a:avLst/>
@@ -410,16 +735,16 @@
           <a:p>
             <a:pPr algn="ctr">
               <a:lnSpc>
-                <a:spcPts val="2700"/>
-              </a:lnSpc>
-            </a:pPr>
-            <a:r>
-              <a:rPr sz="1800" b="0">
+                <a:spcPts val="2730"/>
+              </a:lnSpc>
+            </a:pPr>
+            <a:r>
+              <a:rPr sz="2100" b="1">
                 <a:solidFill>
                   <a:schemeClr val="tx2"/>
                 </a:solidFill>
-                <a:latin typeface="+mn-lt"/>
-                <a:ea typeface="+mn-ea"/>
+                <a:latin typeface="+mj-lt"/>
+                <a:ea typeface="+mj-ea"/>
               </a:rPr>
               <a:t>성장 지표 회고와 Q4 계획</a:t>
             </a:r>
@@ -460,7 +785,7 @@
         <p:spPr>
           <a:xfrm>
             <a:off x="609600" y="609600"/>
-            <a:ext cx="5372100" cy="1171575"/>
+            <a:ext cx="10972800" cy="445740"/>
           </a:xfrm>
           <a:prstGeom prst="rect">
             <a:avLst/>
@@ -496,14 +821,45 @@
       </p:sp>
       <p:sp>
         <p:nvSpPr>
-          <p:cNvPr id="3" name="text s1.1.0.0"/>
-          <p:cNvSpPr txBox="1"/>
-          <p:nvPr/>
-        </p:nvSpPr>
-        <p:spPr>
-          <a:xfrm>
-            <a:off x="6210300" y="609600"/>
-            <a:ext cx="1574453" cy="257175"/>
+          <p:cNvPr id="3" name="shape s1.1.0"/>
+          <p:cNvSpPr/>
+          <p:nvPr/>
+        </p:nvSpPr>
+        <p:spPr>
+          <a:xfrm>
+            <a:off x="609600" y="1283940"/>
+            <a:ext cx="2571750" cy="4964460"/>
+          </a:xfrm>
+          <a:prstGeom prst="roundRect">
+            <a:avLst>
+              <a:gd name="adj" fmla="val 8889"/>
+            </a:avLst>
+          </a:prstGeom>
+          <a:solidFill>
+            <a:schemeClr val="bg2"/>
+          </a:solidFill>
+          <a:ln>
+            <a:noFill/>
+          </a:ln>
+        </p:spPr>
+        <p:txBody>
+          <a:bodyPr wrap="square" lIns="342900" tIns="342900" rIns="342900" bIns="342900" anchor="t">
+            <a:normAutofit/>
+          </a:bodyPr>
+          <a:lstStyle/>
+          <a:p/>
+        </p:txBody>
+      </p:sp>
+      <p:sp>
+        <p:nvSpPr>
+          <p:cNvPr id="4" name="text s1.1.0.0.0"/>
+          <p:cNvSpPr txBox="1"/>
+          <p:nvPr/>
+        </p:nvSpPr>
+        <p:spPr>
+          <a:xfrm>
+            <a:off x="1019324" y="1693664"/>
+            <a:ext cx="1752302" cy="731490"/>
           </a:xfrm>
           <a:prstGeom prst="rect">
             <a:avLst/>
@@ -521,96 +877,469 @@
           <a:p>
             <a:pPr algn="l">
               <a:lnSpc>
-                <a:spcPts val="2025"/>
-              </a:lnSpc>
-            </a:pPr>
-            <a:r>
-              <a:rPr sz="1350" b="1">
+                <a:spcPts val="5760"/>
+              </a:lnSpc>
+            </a:pPr>
+            <a:r>
+              <a:rPr sz="4800" b="1">
                 <a:solidFill>
                   <a:schemeClr val="accent1"/>
+                </a:solidFill>
+                <a:latin typeface="+mj-lt"/>
+                <a:ea typeface="+mj-ea"/>
+              </a:rPr>
+              <a:t>01</a:t>
+            </a:r>
+          </a:p>
+        </p:txBody>
+      </p:sp>
+      <p:sp>
+        <p:nvSpPr>
+          <p:cNvPr id="5" name="text s1.1.0.0.1.0"/>
+          <p:cNvSpPr txBox="1"/>
+          <p:nvPr/>
+        </p:nvSpPr>
+        <p:spPr>
+          <a:xfrm>
+            <a:off x="1019324" y="5194995"/>
+            <a:ext cx="1752302" cy="346621"/>
+          </a:xfrm>
+          <a:prstGeom prst="rect">
+            <a:avLst/>
+          </a:prstGeom>
+          <a:noFill/>
+          <a:ln>
+            <a:noFill/>
+          </a:ln>
+        </p:spPr>
+        <p:txBody>
+          <a:bodyPr wrap="square" lIns="0" tIns="0" rIns="0" bIns="0" anchor="t">
+            <a:normAutofit/>
+          </a:bodyPr>
+          <a:lstStyle/>
+          <a:p>
+            <a:pPr algn="l">
+              <a:lnSpc>
+                <a:spcPts val="2730"/>
+              </a:lnSpc>
+            </a:pPr>
+            <a:r>
+              <a:rPr sz="2100" b="1">
+                <a:solidFill>
+                  <a:schemeClr val="tx1"/>
+                </a:solidFill>
+                <a:latin typeface="+mj-lt"/>
+                <a:ea typeface="+mj-ea"/>
+              </a:rPr>
+              <a:t>핵심 지표</a:t>
+            </a:r>
+          </a:p>
+        </p:txBody>
+      </p:sp>
+      <p:sp>
+        <p:nvSpPr>
+          <p:cNvPr id="6" name="text s1.1.0.0.1.1"/>
+          <p:cNvSpPr txBox="1"/>
+          <p:nvPr/>
+        </p:nvSpPr>
+        <p:spPr>
+          <a:xfrm>
+            <a:off x="1019324" y="5598765"/>
+            <a:ext cx="1752302" cy="239911"/>
+          </a:xfrm>
+          <a:prstGeom prst="rect">
+            <a:avLst/>
+          </a:prstGeom>
+          <a:noFill/>
+          <a:ln>
+            <a:noFill/>
+          </a:ln>
+        </p:spPr>
+        <p:txBody>
+          <a:bodyPr wrap="square" lIns="0" tIns="0" rIns="0" bIns="0" anchor="t">
+            <a:normAutofit/>
+          </a:bodyPr>
+          <a:lstStyle/>
+          <a:p>
+            <a:pPr algn="l">
+              <a:lnSpc>
+                <a:spcPts val="1890"/>
+              </a:lnSpc>
+            </a:pPr>
+            <a:r>
+              <a:rPr sz="1350" b="0">
+                <a:solidFill>
+                  <a:schemeClr val="tx2"/>
                 </a:solidFill>
                 <a:latin typeface="+mn-lt"/>
                 <a:ea typeface="+mn-ea"/>
               </a:rPr>
-              <a:t>돌아보기</a:t>
-            </a:r>
-          </a:p>
-        </p:txBody>
-      </p:sp>
-      <p:sp>
-        <p:nvSpPr>
-          <p:cNvPr id="4" name="ul s1.1.0.1"/>
-          <p:cNvSpPr txBox="1"/>
-          <p:nvPr/>
-        </p:nvSpPr>
-        <p:spPr>
-          <a:xfrm>
-            <a:off x="6210300" y="1095375"/>
-            <a:ext cx="1574453" cy="685800"/>
-          </a:xfrm>
-          <a:prstGeom prst="rect">
-            <a:avLst/>
-          </a:prstGeom>
-          <a:noFill/>
-          <a:ln>
-            <a:noFill/>
-          </a:ln>
-        </p:spPr>
-        <p:txBody>
-          <a:bodyPr wrap="square" lIns="0" tIns="0" rIns="0" bIns="0" anchor="t">
-            <a:normAutofit/>
-          </a:bodyPr>
-          <a:lstStyle/>
-          <a:p>
-            <a:pPr marL="342900" indent="-342900" algn="l">
-              <a:lnSpc>
-                <a:spcPts val="2700"/>
-              </a:lnSpc>
-              <a:buFont typeface="+mn-lt"/>
-              <a:buChar char="•"/>
-            </a:pPr>
-            <a:r>
-              <a:rPr sz="1800" b="0">
+              <a:t>사용자 · 매출 · 평점</a:t>
+            </a:r>
+          </a:p>
+        </p:txBody>
+      </p:sp>
+      <p:sp>
+        <p:nvSpPr>
+          <p:cNvPr id="7" name="shape s1.1.1"/>
+          <p:cNvSpPr/>
+          <p:nvPr/>
+        </p:nvSpPr>
+        <p:spPr>
+          <a:xfrm>
+            <a:off x="3409950" y="1283940"/>
+            <a:ext cx="2571750" cy="4964460"/>
+          </a:xfrm>
+          <a:prstGeom prst="roundRect">
+            <a:avLst>
+              <a:gd name="adj" fmla="val 8889"/>
+            </a:avLst>
+          </a:prstGeom>
+          <a:solidFill>
+            <a:schemeClr val="bg2"/>
+          </a:solidFill>
+          <a:ln>
+            <a:noFill/>
+          </a:ln>
+        </p:spPr>
+        <p:txBody>
+          <a:bodyPr wrap="square" lIns="342900" tIns="342900" rIns="342900" bIns="342900" anchor="t">
+            <a:normAutofit/>
+          </a:bodyPr>
+          <a:lstStyle/>
+          <a:p/>
+        </p:txBody>
+      </p:sp>
+      <p:sp>
+        <p:nvSpPr>
+          <p:cNvPr id="8" name="text s1.1.1.0.0"/>
+          <p:cNvSpPr txBox="1"/>
+          <p:nvPr/>
+        </p:nvSpPr>
+        <p:spPr>
+          <a:xfrm>
+            <a:off x="3819674" y="1693664"/>
+            <a:ext cx="1752302" cy="731490"/>
+          </a:xfrm>
+          <a:prstGeom prst="rect">
+            <a:avLst/>
+          </a:prstGeom>
+          <a:noFill/>
+          <a:ln>
+            <a:noFill/>
+          </a:ln>
+        </p:spPr>
+        <p:txBody>
+          <a:bodyPr wrap="square" lIns="0" tIns="0" rIns="0" bIns="0" anchor="t">
+            <a:normAutofit/>
+          </a:bodyPr>
+          <a:lstStyle/>
+          <a:p>
+            <a:pPr algn="l">
+              <a:lnSpc>
+                <a:spcPts val="5760"/>
+              </a:lnSpc>
+            </a:pPr>
+            <a:r>
+              <a:rPr sz="4800" b="1">
+                <a:solidFill>
+                  <a:schemeClr val="accent1"/>
+                </a:solidFill>
+                <a:latin typeface="+mj-lt"/>
+                <a:ea typeface="+mj-ea"/>
+              </a:rPr>
+              <a:t>02</a:t>
+            </a:r>
+          </a:p>
+        </p:txBody>
+      </p:sp>
+      <p:sp>
+        <p:nvSpPr>
+          <p:cNvPr id="9" name="text s1.1.1.0.1.0"/>
+          <p:cNvSpPr txBox="1"/>
+          <p:nvPr/>
+        </p:nvSpPr>
+        <p:spPr>
+          <a:xfrm>
+            <a:off x="3819674" y="5194995"/>
+            <a:ext cx="1752302" cy="346621"/>
+          </a:xfrm>
+          <a:prstGeom prst="rect">
+            <a:avLst/>
+          </a:prstGeom>
+          <a:noFill/>
+          <a:ln>
+            <a:noFill/>
+          </a:ln>
+        </p:spPr>
+        <p:txBody>
+          <a:bodyPr wrap="square" lIns="0" tIns="0" rIns="0" bIns="0" anchor="t">
+            <a:normAutofit/>
+          </a:bodyPr>
+          <a:lstStyle/>
+          <a:p>
+            <a:pPr algn="l">
+              <a:lnSpc>
+                <a:spcPts val="2730"/>
+              </a:lnSpc>
+            </a:pPr>
+            <a:r>
+              <a:rPr sz="2100" b="1">
                 <a:solidFill>
                   <a:schemeClr val="tx1"/>
+                </a:solidFill>
+                <a:latin typeface="+mj-lt"/>
+                <a:ea typeface="+mj-ea"/>
+              </a:rPr>
+              <a:t>채널별 성과</a:t>
+            </a:r>
+          </a:p>
+        </p:txBody>
+      </p:sp>
+      <p:sp>
+        <p:nvSpPr>
+          <p:cNvPr id="10" name="text s1.1.1.0.1.1"/>
+          <p:cNvSpPr txBox="1"/>
+          <p:nvPr/>
+        </p:nvSpPr>
+        <p:spPr>
+          <a:xfrm>
+            <a:off x="3819674" y="5598765"/>
+            <a:ext cx="1752302" cy="239911"/>
+          </a:xfrm>
+          <a:prstGeom prst="rect">
+            <a:avLst/>
+          </a:prstGeom>
+          <a:noFill/>
+          <a:ln>
+            <a:noFill/>
+          </a:ln>
+        </p:spPr>
+        <p:txBody>
+          <a:bodyPr wrap="square" lIns="0" tIns="0" rIns="0" bIns="0" anchor="t">
+            <a:normAutofit/>
+          </a:bodyPr>
+          <a:lstStyle/>
+          <a:p>
+            <a:pPr algn="l">
+              <a:lnSpc>
+                <a:spcPts val="1890"/>
+              </a:lnSpc>
+            </a:pPr>
+            <a:r>
+              <a:rPr sz="1350" b="0">
+                <a:solidFill>
+                  <a:schemeClr val="tx2"/>
                 </a:solidFill>
                 <a:latin typeface="+mn-lt"/>
                 <a:ea typeface="+mn-ea"/>
               </a:rPr>
-              <a:t>핵심 지표 3종</a:t>
-            </a:r>
-          </a:p>
-          <a:p>
-            <a:pPr marL="342900" indent="-342900" algn="l">
-              <a:lnSpc>
-                <a:spcPts val="2700"/>
-              </a:lnSpc>
-              <a:buFont typeface="+mn-lt"/>
-              <a:buChar char="•"/>
-            </a:pPr>
-            <a:r>
-              <a:rPr sz="1800" b="0">
+              <a:t>전환율과 획득 비용</a:t>
+            </a:r>
+          </a:p>
+        </p:txBody>
+      </p:sp>
+      <p:sp>
+        <p:nvSpPr>
+          <p:cNvPr id="11" name="shape s1.1.2"/>
+          <p:cNvSpPr/>
+          <p:nvPr/>
+        </p:nvSpPr>
+        <p:spPr>
+          <a:xfrm>
+            <a:off x="6210300" y="1283940"/>
+            <a:ext cx="2571750" cy="4964460"/>
+          </a:xfrm>
+          <a:prstGeom prst="roundRect">
+            <a:avLst>
+              <a:gd name="adj" fmla="val 8889"/>
+            </a:avLst>
+          </a:prstGeom>
+          <a:solidFill>
+            <a:schemeClr val="bg2"/>
+          </a:solidFill>
+          <a:ln>
+            <a:noFill/>
+          </a:ln>
+        </p:spPr>
+        <p:txBody>
+          <a:bodyPr wrap="square" lIns="342900" tIns="342900" rIns="342900" bIns="342900" anchor="t">
+            <a:normAutofit/>
+          </a:bodyPr>
+          <a:lstStyle/>
+          <a:p/>
+        </p:txBody>
+      </p:sp>
+      <p:sp>
+        <p:nvSpPr>
+          <p:cNvPr id="12" name="text s1.1.2.0.0"/>
+          <p:cNvSpPr txBox="1"/>
+          <p:nvPr/>
+        </p:nvSpPr>
+        <p:spPr>
+          <a:xfrm>
+            <a:off x="6620024" y="1693664"/>
+            <a:ext cx="1752302" cy="731490"/>
+          </a:xfrm>
+          <a:prstGeom prst="rect">
+            <a:avLst/>
+          </a:prstGeom>
+          <a:noFill/>
+          <a:ln>
+            <a:noFill/>
+          </a:ln>
+        </p:spPr>
+        <p:txBody>
+          <a:bodyPr wrap="square" lIns="0" tIns="0" rIns="0" bIns="0" anchor="t">
+            <a:normAutofit/>
+          </a:bodyPr>
+          <a:lstStyle/>
+          <a:p>
+            <a:pPr algn="l">
+              <a:lnSpc>
+                <a:spcPts val="5760"/>
+              </a:lnSpc>
+            </a:pPr>
+            <a:r>
+              <a:rPr sz="4800" b="1">
+                <a:solidFill>
+                  <a:schemeClr val="accent1"/>
+                </a:solidFill>
+                <a:latin typeface="+mj-lt"/>
+                <a:ea typeface="+mj-ea"/>
+              </a:rPr>
+              <a:t>03</a:t>
+            </a:r>
+          </a:p>
+        </p:txBody>
+      </p:sp>
+      <p:sp>
+        <p:nvSpPr>
+          <p:cNvPr id="13" name="text s1.1.2.0.1.0"/>
+          <p:cNvSpPr txBox="1"/>
+          <p:nvPr/>
+        </p:nvSpPr>
+        <p:spPr>
+          <a:xfrm>
+            <a:off x="6620024" y="5194995"/>
+            <a:ext cx="1752302" cy="346621"/>
+          </a:xfrm>
+          <a:prstGeom prst="rect">
+            <a:avLst/>
+          </a:prstGeom>
+          <a:noFill/>
+          <a:ln>
+            <a:noFill/>
+          </a:ln>
+        </p:spPr>
+        <p:txBody>
+          <a:bodyPr wrap="square" lIns="0" tIns="0" rIns="0" bIns="0" anchor="t">
+            <a:normAutofit/>
+          </a:bodyPr>
+          <a:lstStyle/>
+          <a:p>
+            <a:pPr algn="l">
+              <a:lnSpc>
+                <a:spcPts val="2730"/>
+              </a:lnSpc>
+            </a:pPr>
+            <a:r>
+              <a:rPr sz="2100" b="1">
                 <a:solidFill>
                   <a:schemeClr val="tx1"/>
+                </a:solidFill>
+                <a:latin typeface="+mj-lt"/>
+                <a:ea typeface="+mj-ea"/>
+              </a:rPr>
+              <a:t>가장 큰 학습</a:t>
+            </a:r>
+          </a:p>
+        </p:txBody>
+      </p:sp>
+      <p:sp>
+        <p:nvSpPr>
+          <p:cNvPr id="14" name="text s1.1.2.0.1.1"/>
+          <p:cNvSpPr txBox="1"/>
+          <p:nvPr/>
+        </p:nvSpPr>
+        <p:spPr>
+          <a:xfrm>
+            <a:off x="6620024" y="5598765"/>
+            <a:ext cx="1752302" cy="239911"/>
+          </a:xfrm>
+          <a:prstGeom prst="rect">
+            <a:avLst/>
+          </a:prstGeom>
+          <a:noFill/>
+          <a:ln>
+            <a:noFill/>
+          </a:ln>
+        </p:spPr>
+        <p:txBody>
+          <a:bodyPr wrap="square" lIns="0" tIns="0" rIns="0" bIns="0" anchor="t">
+            <a:normAutofit/>
+          </a:bodyPr>
+          <a:lstStyle/>
+          <a:p>
+            <a:pPr algn="l">
+              <a:lnSpc>
+                <a:spcPts val="1890"/>
+              </a:lnSpc>
+            </a:pPr>
+            <a:r>
+              <a:rPr sz="1350" b="0">
+                <a:solidFill>
+                  <a:schemeClr val="tx2"/>
                 </a:solidFill>
                 <a:latin typeface="+mn-lt"/>
                 <a:ea typeface="+mn-ea"/>
               </a:rPr>
-              <a:t>가장 큰 학습</a:t>
-            </a:r>
-          </a:p>
-        </p:txBody>
-      </p:sp>
-      <p:sp>
-        <p:nvSpPr>
-          <p:cNvPr id="5" name="text s1.1.1.0"/>
-          <p:cNvSpPr txBox="1"/>
-          <p:nvPr/>
-        </p:nvSpPr>
-        <p:spPr>
-          <a:xfrm>
-            <a:off x="10190559" y="609600"/>
-            <a:ext cx="1391841" cy="257175"/>
+              <a:t>추천 채널의 CAC</a:t>
+            </a:r>
+          </a:p>
+        </p:txBody>
+      </p:sp>
+      <p:sp>
+        <p:nvSpPr>
+          <p:cNvPr id="15" name="shape s1.1.3"/>
+          <p:cNvSpPr/>
+          <p:nvPr/>
+        </p:nvSpPr>
+        <p:spPr>
+          <a:xfrm>
+            <a:off x="9010650" y="1283940"/>
+            <a:ext cx="2571750" cy="4964460"/>
+          </a:xfrm>
+          <a:prstGeom prst="roundRect">
+            <a:avLst>
+              <a:gd name="adj" fmla="val 8889"/>
+            </a:avLst>
+          </a:prstGeom>
+          <a:solidFill>
+            <a:schemeClr val="accent1"/>
+          </a:solidFill>
+          <a:ln>
+            <a:noFill/>
+          </a:ln>
+        </p:spPr>
+        <p:txBody>
+          <a:bodyPr wrap="square" lIns="342900" tIns="342900" rIns="342900" bIns="342900" anchor="t">
+            <a:normAutofit/>
+          </a:bodyPr>
+          <a:lstStyle/>
+          <a:p/>
+        </p:txBody>
+      </p:sp>
+      <p:sp>
+        <p:nvSpPr>
+          <p:cNvPr id="16" name="text s1.1.3.0.0"/>
+          <p:cNvSpPr txBox="1"/>
+          <p:nvPr/>
+        </p:nvSpPr>
+        <p:spPr>
+          <a:xfrm>
+            <a:off x="9420374" y="1693664"/>
+            <a:ext cx="1752302" cy="731490"/>
           </a:xfrm>
           <a:prstGeom prst="rect">
             <a:avLst/>
@@ -628,82 +1357,104 @@
           <a:p>
             <a:pPr algn="l">
               <a:lnSpc>
-                <a:spcPts val="2025"/>
-              </a:lnSpc>
-            </a:pPr>
-            <a:r>
-              <a:rPr sz="1350" b="1">
-                <a:solidFill>
-                  <a:schemeClr val="accent1"/>
+                <a:spcPts val="5760"/>
+              </a:lnSpc>
+            </a:pPr>
+            <a:r>
+              <a:rPr sz="4800" b="1">
+                <a:solidFill>
+                  <a:schemeClr val="bg1"/>
+                </a:solidFill>
+                <a:latin typeface="+mj-lt"/>
+                <a:ea typeface="+mj-ea"/>
+              </a:rPr>
+              <a:t>04</a:t>
+            </a:r>
+          </a:p>
+        </p:txBody>
+      </p:sp>
+      <p:sp>
+        <p:nvSpPr>
+          <p:cNvPr id="17" name="text s1.1.3.0.1.0"/>
+          <p:cNvSpPr txBox="1"/>
+          <p:nvPr/>
+        </p:nvSpPr>
+        <p:spPr>
+          <a:xfrm>
+            <a:off x="9420374" y="5194995"/>
+            <a:ext cx="1752302" cy="346621"/>
+          </a:xfrm>
+          <a:prstGeom prst="rect">
+            <a:avLst/>
+          </a:prstGeom>
+          <a:noFill/>
+          <a:ln>
+            <a:noFill/>
+          </a:ln>
+        </p:spPr>
+        <p:txBody>
+          <a:bodyPr wrap="square" lIns="0" tIns="0" rIns="0" bIns="0" anchor="t">
+            <a:normAutofit/>
+          </a:bodyPr>
+          <a:lstStyle/>
+          <a:p>
+            <a:pPr algn="l">
+              <a:lnSpc>
+                <a:spcPts val="2730"/>
+              </a:lnSpc>
+            </a:pPr>
+            <a:r>
+              <a:rPr sz="2100" b="1">
+                <a:solidFill>
+                  <a:schemeClr val="bg1"/>
+                </a:solidFill>
+                <a:latin typeface="+mj-lt"/>
+                <a:ea typeface="+mj-ea"/>
+              </a:rPr>
+              <a:t>Q4 계획</a:t>
+            </a:r>
+          </a:p>
+        </p:txBody>
+      </p:sp>
+      <p:sp>
+        <p:nvSpPr>
+          <p:cNvPr id="18" name="text s1.1.3.0.1.1"/>
+          <p:cNvSpPr txBox="1"/>
+          <p:nvPr/>
+        </p:nvSpPr>
+        <p:spPr>
+          <a:xfrm>
+            <a:off x="9420374" y="5598765"/>
+            <a:ext cx="1752302" cy="239911"/>
+          </a:xfrm>
+          <a:prstGeom prst="rect">
+            <a:avLst/>
+          </a:prstGeom>
+          <a:noFill/>
+          <a:ln>
+            <a:noFill/>
+          </a:ln>
+        </p:spPr>
+        <p:txBody>
+          <a:bodyPr wrap="square" lIns="0" tIns="0" rIns="0" bIns="0" anchor="t">
+            <a:normAutofit/>
+          </a:bodyPr>
+          <a:lstStyle/>
+          <a:p>
+            <a:pPr algn="l">
+              <a:lnSpc>
+                <a:spcPts val="1890"/>
+              </a:lnSpc>
+            </a:pPr>
+            <a:r>
+              <a:rPr sz="1350" b="0">
+                <a:solidFill>
+                  <a:schemeClr val="bg1"/>
                 </a:solidFill>
                 <a:latin typeface="+mn-lt"/>
                 <a:ea typeface="+mn-ea"/>
               </a:rPr>
-              <a:t>내다보기</a:t>
-            </a:r>
-          </a:p>
-        </p:txBody>
-      </p:sp>
-      <p:sp>
-        <p:nvSpPr>
-          <p:cNvPr id="6" name="ul s1.1.1.1"/>
-          <p:cNvSpPr txBox="1"/>
-          <p:nvPr/>
-        </p:nvSpPr>
-        <p:spPr>
-          <a:xfrm>
-            <a:off x="10190559" y="1095375"/>
-            <a:ext cx="1391841" cy="685800"/>
-          </a:xfrm>
-          <a:prstGeom prst="rect">
-            <a:avLst/>
-          </a:prstGeom>
-          <a:noFill/>
-          <a:ln>
-            <a:noFill/>
-          </a:ln>
-        </p:spPr>
-        <p:txBody>
-          <a:bodyPr wrap="square" lIns="0" tIns="0" rIns="0" bIns="0" anchor="t">
-            <a:normAutofit/>
-          </a:bodyPr>
-          <a:lstStyle/>
-          <a:p>
-            <a:pPr marL="342900" indent="-342900" algn="l">
-              <a:lnSpc>
-                <a:spcPts val="2700"/>
-              </a:lnSpc>
-              <a:buFont typeface="+mn-lt"/>
-              <a:buChar char="•"/>
-            </a:pPr>
-            <a:r>
-              <a:rPr sz="1800" b="0">
-                <a:solidFill>
-                  <a:schemeClr val="tx1"/>
-                </a:solidFill>
-                <a:latin typeface="+mn-lt"/>
-                <a:ea typeface="+mn-ea"/>
-              </a:rPr>
-              <a:t>Q4 목표</a:t>
-            </a:r>
-          </a:p>
-          <a:p>
-            <a:pPr marL="342900" indent="-342900" algn="l">
-              <a:lnSpc>
-                <a:spcPts val="2700"/>
-              </a:lnSpc>
-              <a:buFont typeface="+mn-lt"/>
-              <a:buChar char="•"/>
-            </a:pPr>
-            <a:r>
-              <a:rPr sz="1800" b="0">
-                <a:solidFill>
-                  <a:schemeClr val="tx1"/>
-                </a:solidFill>
-                <a:latin typeface="+mn-lt"/>
-                <a:ea typeface="+mn-ea"/>
-              </a:rPr>
-              <a:t>필요한 투자</a:t>
+              <a:t>목표와 필요한 투자</a:t>
             </a:r>
           </a:p>
         </p:txBody>
@@ -785,11 +1536,11 @@
         <p:spPr>
           <a:xfrm>
             <a:off x="609600" y="1283940"/>
-            <a:ext cx="3429000" cy="1905000"/>
+            <a:ext cx="3429000" cy="4495949"/>
           </a:xfrm>
           <a:prstGeom prst="roundRect">
             <a:avLst>
-              <a:gd name="adj" fmla="val 12000"/>
+              <a:gd name="adj" fmla="val 6667"/>
             </a:avLst>
           </a:prstGeom>
           <a:solidFill>
@@ -811,14 +1562,84 @@
             <a:normAutofit/>
           </a:bodyPr>
           <a:lstStyle/>
-          <a:p>
-            <a:pPr algn="ctr">
-              <a:lnSpc>
-                <a:spcPts val="5040"/>
-              </a:lnSpc>
-            </a:pPr>
-            <a:r>
-              <a:rPr sz="4200" b="1">
+          <a:p/>
+        </p:txBody>
+      </p:sp>
+      <p:sp>
+        <p:nvSpPr>
+          <p:cNvPr id="4" name="text s2.1.0.0.0"/>
+          <p:cNvSpPr txBox="1"/>
+          <p:nvPr/>
+        </p:nvSpPr>
+        <p:spPr>
+          <a:xfrm>
+            <a:off x="1019324" y="1693664"/>
+            <a:ext cx="2609552" cy="257175"/>
+          </a:xfrm>
+          <a:prstGeom prst="rect">
+            <a:avLst/>
+          </a:prstGeom>
+          <a:noFill/>
+          <a:ln>
+            <a:noFill/>
+          </a:ln>
+        </p:spPr>
+        <p:txBody>
+          <a:bodyPr wrap="square" lIns="0" tIns="0" rIns="0" bIns="0" anchor="t">
+            <a:normAutofit/>
+          </a:bodyPr>
+          <a:lstStyle/>
+          <a:p>
+            <a:pPr algn="l">
+              <a:lnSpc>
+                <a:spcPts val="2025"/>
+              </a:lnSpc>
+            </a:pPr>
+            <a:r>
+              <a:rPr sz="1350" b="1">
+                <a:solidFill>
+                  <a:schemeClr val="accent1"/>
+                </a:solidFill>
+                <a:latin typeface="+mn-lt"/>
+                <a:ea typeface="+mn-ea"/>
+              </a:rPr>
+              <a:t>월간 활성 사용자</a:t>
+            </a:r>
+          </a:p>
+        </p:txBody>
+      </p:sp>
+      <p:sp>
+        <p:nvSpPr>
+          <p:cNvPr id="5" name="text s2.1.0.0.1"/>
+          <p:cNvSpPr txBox="1"/>
+          <p:nvPr/>
+        </p:nvSpPr>
+        <p:spPr>
+          <a:xfrm>
+            <a:off x="1019324" y="2837706"/>
+            <a:ext cx="2609552" cy="1005780"/>
+          </a:xfrm>
+          <a:prstGeom prst="rect">
+            <a:avLst/>
+          </a:prstGeom>
+          <a:noFill/>
+          <a:ln>
+            <a:noFill/>
+          </a:ln>
+        </p:spPr>
+        <p:txBody>
+          <a:bodyPr wrap="square" lIns="0" tIns="0" rIns="0" bIns="0" anchor="t">
+            <a:normAutofit/>
+          </a:bodyPr>
+          <a:lstStyle/>
+          <a:p>
+            <a:pPr algn="l">
+              <a:lnSpc>
+                <a:spcPts val="7920"/>
+              </a:lnSpc>
+            </a:pPr>
+            <a:r>
+              <a:rPr sz="6600" b="1">
                 <a:solidFill>
                   <a:schemeClr val="accent1"/>
                 </a:solidFill>
@@ -828,8 +1649,34 @@
               <a:t>+38%</a:t>
             </a:r>
           </a:p>
-          <a:p>
-            <a:pPr algn="ctr">
+        </p:txBody>
+      </p:sp>
+      <p:sp>
+        <p:nvSpPr>
+          <p:cNvPr id="6" name="p s2.1.0.0.2.0"/>
+          <p:cNvSpPr txBox="1"/>
+          <p:nvPr/>
+        </p:nvSpPr>
+        <p:spPr>
+          <a:xfrm>
+            <a:off x="1019324" y="4730204"/>
+            <a:ext cx="2609552" cy="342900"/>
+          </a:xfrm>
+          <a:prstGeom prst="rect">
+            <a:avLst/>
+          </a:prstGeom>
+          <a:noFill/>
+          <a:ln>
+            <a:noFill/>
+          </a:ln>
+        </p:spPr>
+        <p:txBody>
+          <a:bodyPr wrap="square" lIns="0" tIns="0" rIns="0" bIns="0" anchor="t">
+            <a:normAutofit/>
+          </a:bodyPr>
+          <a:lstStyle/>
+          <a:p>
+            <a:pPr algn="l">
               <a:lnSpc>
                 <a:spcPts val="2700"/>
               </a:lnSpc>
@@ -842,25 +1689,68 @@
                 <a:latin typeface="+mn-lt"/>
                 <a:ea typeface="+mn-ea"/>
               </a:rPr>
-              <a:t>월간 활성 사용자</a:t>
-            </a:r>
-          </a:p>
-        </p:txBody>
-      </p:sp>
-      <p:sp>
-        <p:nvSpPr>
-          <p:cNvPr id="4" name="shape s2.1.1"/>
+              <a:t>2.1M → 2.9M</a:t>
+            </a:r>
+          </a:p>
+        </p:txBody>
+      </p:sp>
+      <p:sp>
+        <p:nvSpPr>
+          <p:cNvPr id="7" name="text s2.1.0.0.2.1"/>
+          <p:cNvSpPr txBox="1"/>
+          <p:nvPr/>
+        </p:nvSpPr>
+        <p:spPr>
+          <a:xfrm>
+            <a:off x="1019324" y="5130254"/>
+            <a:ext cx="2609552" cy="239911"/>
+          </a:xfrm>
+          <a:prstGeom prst="rect">
+            <a:avLst/>
+          </a:prstGeom>
+          <a:noFill/>
+          <a:ln>
+            <a:noFill/>
+          </a:ln>
+        </p:spPr>
+        <p:txBody>
+          <a:bodyPr wrap="square" lIns="0" tIns="0" rIns="0" bIns="0" anchor="t">
+            <a:normAutofit/>
+          </a:bodyPr>
+          <a:lstStyle/>
+          <a:p>
+            <a:pPr algn="l">
+              <a:lnSpc>
+                <a:spcPts val="1890"/>
+              </a:lnSpc>
+            </a:pPr>
+            <a:r>
+              <a:rPr sz="1350" b="0">
+                <a:solidFill>
+                  <a:schemeClr val="tx2"/>
+                </a:solidFill>
+                <a:latin typeface="+mn-lt"/>
+                <a:ea typeface="+mn-ea"/>
+              </a:rPr>
+              <a:t>Q2 대비 · 목표 +30%</a:t>
+            </a:r>
+          </a:p>
+        </p:txBody>
+      </p:sp>
+      <p:sp>
+        <p:nvSpPr>
+          <p:cNvPr id="8" name="shape s2.1.1"/>
           <p:cNvSpPr/>
           <p:nvPr/>
         </p:nvSpPr>
         <p:spPr>
           <a:xfrm>
             <a:off x="4381500" y="1283940"/>
-            <a:ext cx="3429000" cy="1905000"/>
+            <a:ext cx="3429000" cy="4495949"/>
           </a:xfrm>
           <a:prstGeom prst="roundRect">
             <a:avLst>
-              <a:gd name="adj" fmla="val 12000"/>
+              <a:gd name="adj" fmla="val 6667"/>
             </a:avLst>
           </a:prstGeom>
           <a:solidFill>
@@ -882,14 +1772,84 @@
             <a:normAutofit/>
           </a:bodyPr>
           <a:lstStyle/>
-          <a:p>
-            <a:pPr algn="ctr">
-              <a:lnSpc>
-                <a:spcPts val="5040"/>
-              </a:lnSpc>
-            </a:pPr>
-            <a:r>
-              <a:rPr sz="4200" b="1">
+          <a:p/>
+        </p:txBody>
+      </p:sp>
+      <p:sp>
+        <p:nvSpPr>
+          <p:cNvPr id="9" name="text s2.1.1.0.0"/>
+          <p:cNvSpPr txBox="1"/>
+          <p:nvPr/>
+        </p:nvSpPr>
+        <p:spPr>
+          <a:xfrm>
+            <a:off x="4791224" y="1693664"/>
+            <a:ext cx="2609552" cy="257175"/>
+          </a:xfrm>
+          <a:prstGeom prst="rect">
+            <a:avLst/>
+          </a:prstGeom>
+          <a:noFill/>
+          <a:ln>
+            <a:noFill/>
+          </a:ln>
+        </p:spPr>
+        <p:txBody>
+          <a:bodyPr wrap="square" lIns="0" tIns="0" rIns="0" bIns="0" anchor="t">
+            <a:normAutofit/>
+          </a:bodyPr>
+          <a:lstStyle/>
+          <a:p>
+            <a:pPr algn="l">
+              <a:lnSpc>
+                <a:spcPts val="2025"/>
+              </a:lnSpc>
+            </a:pPr>
+            <a:r>
+              <a:rPr sz="1350" b="1">
+                <a:solidFill>
+                  <a:schemeClr val="accent1"/>
+                </a:solidFill>
+                <a:latin typeface="+mn-lt"/>
+                <a:ea typeface="+mn-ea"/>
+              </a:rPr>
+              <a:t>분기 매출</a:t>
+            </a:r>
+          </a:p>
+        </p:txBody>
+      </p:sp>
+      <p:sp>
+        <p:nvSpPr>
+          <p:cNvPr id="10" name="text s2.1.1.0.1"/>
+          <p:cNvSpPr txBox="1"/>
+          <p:nvPr/>
+        </p:nvSpPr>
+        <p:spPr>
+          <a:xfrm>
+            <a:off x="4791224" y="2837706"/>
+            <a:ext cx="2609552" cy="1005780"/>
+          </a:xfrm>
+          <a:prstGeom prst="rect">
+            <a:avLst/>
+          </a:prstGeom>
+          <a:noFill/>
+          <a:ln>
+            <a:noFill/>
+          </a:ln>
+        </p:spPr>
+        <p:txBody>
+          <a:bodyPr wrap="square" lIns="0" tIns="0" rIns="0" bIns="0" anchor="t">
+            <a:normAutofit/>
+          </a:bodyPr>
+          <a:lstStyle/>
+          <a:p>
+            <a:pPr algn="l">
+              <a:lnSpc>
+                <a:spcPts val="7920"/>
+              </a:lnSpc>
+            </a:pPr>
+            <a:r>
+              <a:rPr sz="6600" b="1">
                 <a:solidFill>
                   <a:schemeClr val="accent1"/>
                 </a:solidFill>
@@ -899,8 +1859,34 @@
               <a:t>1.2B</a:t>
             </a:r>
           </a:p>
-          <a:p>
-            <a:pPr algn="ctr">
+        </p:txBody>
+      </p:sp>
+      <p:sp>
+        <p:nvSpPr>
+          <p:cNvPr id="11" name="p s2.1.1.0.2.0"/>
+          <p:cNvSpPr txBox="1"/>
+          <p:nvPr/>
+        </p:nvSpPr>
+        <p:spPr>
+          <a:xfrm>
+            <a:off x="4791224" y="4730204"/>
+            <a:ext cx="2609552" cy="342900"/>
+          </a:xfrm>
+          <a:prstGeom prst="rect">
+            <a:avLst/>
+          </a:prstGeom>
+          <a:noFill/>
+          <a:ln>
+            <a:noFill/>
+          </a:ln>
+        </p:spPr>
+        <p:txBody>
+          <a:bodyPr wrap="square" lIns="0" tIns="0" rIns="0" bIns="0" anchor="t">
+            <a:normAutofit/>
+          </a:bodyPr>
+          <a:lstStyle/>
+          <a:p>
+            <a:pPr algn="l">
               <a:lnSpc>
                 <a:spcPts val="2700"/>
               </a:lnSpc>
@@ -913,25 +1899,68 @@
                 <a:latin typeface="+mn-lt"/>
                 <a:ea typeface="+mn-ea"/>
               </a:rPr>
-              <a:t>분기 매출(원)</a:t>
-            </a:r>
-          </a:p>
-        </p:txBody>
-      </p:sp>
-      <p:sp>
-        <p:nvSpPr>
-          <p:cNvPr id="5" name="shape s2.1.2"/>
+              <a:t>목표 대비 108%</a:t>
+            </a:r>
+          </a:p>
+        </p:txBody>
+      </p:sp>
+      <p:sp>
+        <p:nvSpPr>
+          <p:cNvPr id="12" name="text s2.1.1.0.2.1"/>
+          <p:cNvSpPr txBox="1"/>
+          <p:nvPr/>
+        </p:nvSpPr>
+        <p:spPr>
+          <a:xfrm>
+            <a:off x="4791224" y="5130254"/>
+            <a:ext cx="2609552" cy="239911"/>
+          </a:xfrm>
+          <a:prstGeom prst="rect">
+            <a:avLst/>
+          </a:prstGeom>
+          <a:noFill/>
+          <a:ln>
+            <a:noFill/>
+          </a:ln>
+        </p:spPr>
+        <p:txBody>
+          <a:bodyPr wrap="square" lIns="0" tIns="0" rIns="0" bIns="0" anchor="t">
+            <a:normAutofit/>
+          </a:bodyPr>
+          <a:lstStyle/>
+          <a:p>
+            <a:pPr algn="l">
+              <a:lnSpc>
+                <a:spcPts val="1890"/>
+              </a:lnSpc>
+            </a:pPr>
+            <a:r>
+              <a:rPr sz="1350" b="0">
+                <a:solidFill>
+                  <a:schemeClr val="tx2"/>
+                </a:solidFill>
+                <a:latin typeface="+mn-lt"/>
+                <a:ea typeface="+mn-ea"/>
+              </a:rPr>
+              <a:t>원 · 구독 74% · 광고 26%</a:t>
+            </a:r>
+          </a:p>
+        </p:txBody>
+      </p:sp>
+      <p:sp>
+        <p:nvSpPr>
+          <p:cNvPr id="13" name="shape s2.1.2"/>
           <p:cNvSpPr/>
           <p:nvPr/>
         </p:nvSpPr>
         <p:spPr>
           <a:xfrm>
             <a:off x="8153400" y="1283940"/>
-            <a:ext cx="3429000" cy="1905000"/>
+            <a:ext cx="3429000" cy="4495949"/>
           </a:xfrm>
           <a:prstGeom prst="roundRect">
             <a:avLst>
-              <a:gd name="adj" fmla="val 12000"/>
+              <a:gd name="adj" fmla="val 6667"/>
             </a:avLst>
           </a:prstGeom>
           <a:solidFill>
@@ -953,14 +1982,84 @@
             <a:normAutofit/>
           </a:bodyPr>
           <a:lstStyle/>
-          <a:p>
-            <a:pPr algn="ctr">
-              <a:lnSpc>
-                <a:spcPts val="5040"/>
-              </a:lnSpc>
-            </a:pPr>
-            <a:r>
-              <a:rPr sz="4200" b="1">
+          <a:p/>
+        </p:txBody>
+      </p:sp>
+      <p:sp>
+        <p:nvSpPr>
+          <p:cNvPr id="14" name="text s2.1.2.0.0"/>
+          <p:cNvSpPr txBox="1"/>
+          <p:nvPr/>
+        </p:nvSpPr>
+        <p:spPr>
+          <a:xfrm>
+            <a:off x="8563124" y="1693664"/>
+            <a:ext cx="2609552" cy="257175"/>
+          </a:xfrm>
+          <a:prstGeom prst="rect">
+            <a:avLst/>
+          </a:prstGeom>
+          <a:noFill/>
+          <a:ln>
+            <a:noFill/>
+          </a:ln>
+        </p:spPr>
+        <p:txBody>
+          <a:bodyPr wrap="square" lIns="0" tIns="0" rIns="0" bIns="0" anchor="t">
+            <a:normAutofit/>
+          </a:bodyPr>
+          <a:lstStyle/>
+          <a:p>
+            <a:pPr algn="l">
+              <a:lnSpc>
+                <a:spcPts val="2025"/>
+              </a:lnSpc>
+            </a:pPr>
+            <a:r>
+              <a:rPr sz="1350" b="1">
+                <a:solidFill>
+                  <a:schemeClr val="accent1"/>
+                </a:solidFill>
+                <a:latin typeface="+mn-lt"/>
+                <a:ea typeface="+mn-ea"/>
+              </a:rPr>
+              <a:t>앱스토어 평점</a:t>
+            </a:r>
+          </a:p>
+        </p:txBody>
+      </p:sp>
+      <p:sp>
+        <p:nvSpPr>
+          <p:cNvPr id="15" name="text s2.1.2.0.1"/>
+          <p:cNvSpPr txBox="1"/>
+          <p:nvPr/>
+        </p:nvSpPr>
+        <p:spPr>
+          <a:xfrm>
+            <a:off x="8563124" y="2837706"/>
+            <a:ext cx="2609552" cy="1005780"/>
+          </a:xfrm>
+          <a:prstGeom prst="rect">
+            <a:avLst/>
+          </a:prstGeom>
+          <a:noFill/>
+          <a:ln>
+            <a:noFill/>
+          </a:ln>
+        </p:spPr>
+        <p:txBody>
+          <a:bodyPr wrap="square" lIns="0" tIns="0" rIns="0" bIns="0" anchor="t">
+            <a:normAutofit/>
+          </a:bodyPr>
+          <a:lstStyle/>
+          <a:p>
+            <a:pPr algn="l">
+              <a:lnSpc>
+                <a:spcPts val="7920"/>
+              </a:lnSpc>
+            </a:pPr>
+            <a:r>
+              <a:rPr sz="6600" b="1">
                 <a:solidFill>
                   <a:schemeClr val="accent1"/>
                 </a:solidFill>
@@ -970,8 +2069,34 @@
               <a:t>4.6</a:t>
             </a:r>
           </a:p>
-          <a:p>
-            <a:pPr algn="ctr">
+        </p:txBody>
+      </p:sp>
+      <p:sp>
+        <p:nvSpPr>
+          <p:cNvPr id="16" name="p s2.1.2.0.2.0"/>
+          <p:cNvSpPr txBox="1"/>
+          <p:nvPr/>
+        </p:nvSpPr>
+        <p:spPr>
+          <a:xfrm>
+            <a:off x="8563124" y="4730204"/>
+            <a:ext cx="2609552" cy="342900"/>
+          </a:xfrm>
+          <a:prstGeom prst="rect">
+            <a:avLst/>
+          </a:prstGeom>
+          <a:noFill/>
+          <a:ln>
+            <a:noFill/>
+          </a:ln>
+        </p:spPr>
+        <p:txBody>
+          <a:bodyPr wrap="square" lIns="0" tIns="0" rIns="0" bIns="0" anchor="t">
+            <a:normAutofit/>
+          </a:bodyPr>
+          <a:lstStyle/>
+          <a:p>
+            <a:pPr algn="l">
               <a:lnSpc>
                 <a:spcPts val="2700"/>
               </a:lnSpc>
@@ -984,7 +2109,93 @@
                 <a:latin typeface="+mn-lt"/>
                 <a:ea typeface="+mn-ea"/>
               </a:rPr>
-              <a:t>앱스토어 평점</a:t>
+              <a:t>리뷰 18,400건</a:t>
+            </a:r>
+          </a:p>
+        </p:txBody>
+      </p:sp>
+      <p:sp>
+        <p:nvSpPr>
+          <p:cNvPr id="17" name="text s2.1.2.0.2.1"/>
+          <p:cNvSpPr txBox="1"/>
+          <p:nvPr/>
+        </p:nvSpPr>
+        <p:spPr>
+          <a:xfrm>
+            <a:off x="8563124" y="5130254"/>
+            <a:ext cx="2609552" cy="239911"/>
+          </a:xfrm>
+          <a:prstGeom prst="rect">
+            <a:avLst/>
+          </a:prstGeom>
+          <a:noFill/>
+          <a:ln>
+            <a:noFill/>
+          </a:ln>
+        </p:spPr>
+        <p:txBody>
+          <a:bodyPr wrap="square" lIns="0" tIns="0" rIns="0" bIns="0" anchor="t">
+            <a:normAutofit/>
+          </a:bodyPr>
+          <a:lstStyle/>
+          <a:p>
+            <a:pPr algn="l">
+              <a:lnSpc>
+                <a:spcPts val="1890"/>
+              </a:lnSpc>
+            </a:pPr>
+            <a:r>
+              <a:rPr sz="1350" b="0">
+                <a:solidFill>
+                  <a:schemeClr val="tx2"/>
+                </a:solidFill>
+                <a:latin typeface="+mn-lt"/>
+                <a:ea typeface="+mn-ea"/>
+              </a:rPr>
+              <a:t>Q2 4.3 · 1점 리뷰 −41%</a:t>
+            </a:r>
+          </a:p>
+        </p:txBody>
+      </p:sp>
+      <p:sp>
+        <p:nvSpPr>
+          <p:cNvPr id="18" name="text s2.2"/>
+          <p:cNvSpPr txBox="1"/>
+          <p:nvPr/>
+        </p:nvSpPr>
+        <p:spPr>
+          <a:xfrm>
+            <a:off x="609600" y="6008489"/>
+            <a:ext cx="10972800" cy="239911"/>
+          </a:xfrm>
+          <a:prstGeom prst="rect">
+            <a:avLst/>
+          </a:prstGeom>
+          <a:noFill/>
+          <a:ln>
+            <a:noFill/>
+          </a:ln>
+        </p:spPr>
+        <p:txBody>
+          <a:bodyPr wrap="square" lIns="0" tIns="0" rIns="0" bIns="0" anchor="t">
+            <a:normAutofit/>
+          </a:bodyPr>
+          <a:lstStyle/>
+          <a:p>
+            <a:pPr algn="l">
+              <a:lnSpc>
+                <a:spcPts val="1890"/>
+              </a:lnSpc>
+            </a:pPr>
+            <a:r>
+              <a:rPr sz="1350" b="0">
+                <a:solidFill>
+                  <a:schemeClr val="tx2"/>
+                </a:solidFill>
+                <a:latin typeface="+mn-lt"/>
+                <a:ea typeface="+mn-ea"/>
+              </a:rPr>
+              <a:t>세 지표 모두 목표를 넘겼다. 사용자 증가의 절반 이상이 추천 채널에서 왔다.</a:t>
             </a:r>
           </a:p>
         </p:txBody>
@@ -1059,13 +2270,13 @@
       </p:sp>
       <p:graphicFrame>
         <p:nvGraphicFramePr>
-          <p:cNvPr id="3" name="table s3.1"/>
+          <p:cNvPr id="3" name="table s3.1.0"/>
           <p:cNvGraphicFramePr/>
           <p:nvPr/>
         </p:nvGraphicFramePr>
         <p:xfrm>
           <a:off x="609600" y="1283940"/>
-          <a:ext cx="10972800" cy="1524000"/>
+          <a:ext cx="7086600" cy="4495949"/>
         </p:xfrm>
         <a:graphic>
           <a:graphicData uri="http://schemas.openxmlformats.org/drawingml/2006/table">
@@ -1074,11 +2285,12 @@
                 <a:tableStyleId>{5940675A-B579-460E-94D1-54222C63F5DA}</a:tableStyleId>
               </a:tblPr>
               <a:tblGrid>
-                <a:gridCol w="2922538"/>
-                <a:gridCol w="3827710"/>
-                <a:gridCol w="4222552"/>
+                <a:gridCol w="2453134"/>
+                <a:gridCol w="1872853"/>
+                <a:gridCol w="1209675"/>
+                <a:gridCol w="1550938"/>
               </a:tblGrid>
-              <a:tr h="509588">
+              <a:tr h="645616">
                 <a:tc>
                   <a:txBody>
                     <a:bodyPr/>
@@ -1098,6 +2310,58 @@
                           <a:ea typeface="+mn-ea"/>
                         </a:rPr>
                         <a:t>채널</a:t>
+                      </a:r>
+                    </a:p>
+                  </a:txBody>
+                  <a:tcPr marL="114300" marR="114300" marT="76200" marB="76200" anchor="t">
+                    <a:lnL w="9525">
+                      <a:solidFill>
+                        <a:schemeClr val="tx2"/>
+                      </a:solidFill>
+                      <a:prstDash val="solid"/>
+                    </a:lnL>
+                    <a:lnR w="9525">
+                      <a:solidFill>
+                        <a:schemeClr val="tx2"/>
+                      </a:solidFill>
+                      <a:prstDash val="solid"/>
+                    </a:lnR>
+                    <a:lnT w="9525">
+                      <a:solidFill>
+                        <a:schemeClr val="tx2"/>
+                      </a:solidFill>
+                      <a:prstDash val="solid"/>
+                    </a:lnT>
+                    <a:lnB w="9525">
+                      <a:solidFill>
+                        <a:schemeClr val="tx2"/>
+                      </a:solidFill>
+                      <a:prstDash val="solid"/>
+                    </a:lnB>
+                    <a:solidFill>
+                      <a:schemeClr val="accent1"/>
+                    </a:solidFill>
+                  </a:tcPr>
+                </a:tc>
+                <a:tc>
+                  <a:txBody>
+                    <a:bodyPr/>
+                    <a:lstStyle/>
+                    <a:p>
+                      <a:pPr algn="r">
+                        <a:lnSpc>
+                          <a:spcPts val="2700"/>
+                        </a:lnSpc>
+                      </a:pPr>
+                      <a:r>
+                        <a:rPr sz="1800" b="1">
+                          <a:solidFill>
+                            <a:schemeClr val="bg1"/>
+                          </a:solidFill>
+                          <a:latin typeface="+mn-lt"/>
+                          <a:ea typeface="+mn-ea"/>
+                        </a:rPr>
+                        <a:t>신규 사용자</a:t>
                       </a:r>
                     </a:p>
                   </a:txBody>
@@ -1201,7 +2465,7 @@
                           <a:latin typeface="+mn-lt"/>
                           <a:ea typeface="+mn-ea"/>
                         </a:rPr>
-                        <a:t>CAC</a:t>
+                        <a:t>CAC (원)</a:t>
                       </a:r>
                     </a:p>
                   </a:txBody>
@@ -1236,7 +2500,7 @@
                   </a:tcPr>
                 </a:tc>
               </a:tr>
-              <a:tr h="504825">
+              <a:tr h="640854">
                 <a:tc>
                   <a:txBody>
                     <a:bodyPr/>
@@ -1256,6 +2520,56 @@
                           <a:ea typeface="+mn-ea"/>
                         </a:rPr>
                         <a:t>검색</a:t>
+                      </a:r>
+                    </a:p>
+                  </a:txBody>
+                  <a:tcPr marL="114300" marR="114300" marT="76200" marB="76200" anchor="t">
+                    <a:lnL w="9525">
+                      <a:solidFill>
+                        <a:schemeClr val="tx2"/>
+                      </a:solidFill>
+                      <a:prstDash val="solid"/>
+                    </a:lnL>
+                    <a:lnR w="9525">
+                      <a:solidFill>
+                        <a:schemeClr val="tx2"/>
+                      </a:solidFill>
+                      <a:prstDash val="solid"/>
+                    </a:lnR>
+                    <a:lnT w="9525">
+                      <a:solidFill>
+                        <a:schemeClr val="tx2"/>
+                      </a:solidFill>
+                      <a:prstDash val="solid"/>
+                    </a:lnT>
+                    <a:lnB w="9525">
+                      <a:solidFill>
+                        <a:schemeClr val="tx2"/>
+                      </a:solidFill>
+                      <a:prstDash val="solid"/>
+                    </a:lnB>
+                    <a:noFill/>
+                  </a:tcPr>
+                </a:tc>
+                <a:tc>
+                  <a:txBody>
+                    <a:bodyPr/>
+                    <a:lstStyle/>
+                    <a:p>
+                      <a:pPr algn="r">
+                        <a:lnSpc>
+                          <a:spcPts val="2700"/>
+                        </a:lnSpc>
+                      </a:pPr>
+                      <a:r>
+                        <a:rPr sz="1800" b="0">
+                          <a:solidFill>
+                            <a:schemeClr val="tx1"/>
+                          </a:solidFill>
+                          <a:latin typeface="+mn-lt"/>
+                          <a:ea typeface="+mn-ea"/>
+                        </a:rPr>
+                        <a:t>312K</a:t>
                       </a:r>
                     </a:p>
                   </a:txBody>
@@ -1388,7 +2702,7 @@
                   </a:tcPr>
                 </a:tc>
               </a:tr>
-              <a:tr h="509587">
+              <a:tr h="640854">
                 <a:tc>
                   <a:txBody>
                     <a:bodyPr/>
@@ -1408,6 +2722,58 @@
                           <a:ea typeface="+mn-ea"/>
                         </a:rPr>
                         <a:t>추천</a:t>
+                      </a:r>
+                    </a:p>
+                  </a:txBody>
+                  <a:tcPr marL="114300" marR="114300" marT="76200" marB="76200" anchor="t">
+                    <a:lnL w="9525">
+                      <a:solidFill>
+                        <a:schemeClr val="tx2"/>
+                      </a:solidFill>
+                      <a:prstDash val="solid"/>
+                    </a:lnL>
+                    <a:lnR w="9525">
+                      <a:solidFill>
+                        <a:schemeClr val="tx2"/>
+                      </a:solidFill>
+                      <a:prstDash val="solid"/>
+                    </a:lnR>
+                    <a:lnT w="9525">
+                      <a:solidFill>
+                        <a:schemeClr val="tx2"/>
+                      </a:solidFill>
+                      <a:prstDash val="solid"/>
+                    </a:lnT>
+                    <a:lnB w="9525">
+                      <a:solidFill>
+                        <a:schemeClr val="tx2"/>
+                      </a:solidFill>
+                      <a:prstDash val="solid"/>
+                    </a:lnB>
+                    <a:solidFill>
+                      <a:schemeClr val="bg2"/>
+                    </a:solidFill>
+                  </a:tcPr>
+                </a:tc>
+                <a:tc>
+                  <a:txBody>
+                    <a:bodyPr/>
+                    <a:lstStyle/>
+                    <a:p>
+                      <a:pPr algn="r">
+                        <a:lnSpc>
+                          <a:spcPts val="2700"/>
+                        </a:lnSpc>
+                      </a:pPr>
+                      <a:r>
+                        <a:rPr sz="1800" b="0">
+                          <a:solidFill>
+                            <a:schemeClr val="tx1"/>
+                          </a:solidFill>
+                          <a:latin typeface="+mn-lt"/>
+                          <a:ea typeface="+mn-ea"/>
+                        </a:rPr>
+                        <a:t>268K</a:t>
                       </a:r>
                     </a:p>
                   </a:txBody>
@@ -1546,10 +2912,1107 @@
                   </a:tcPr>
                 </a:tc>
               </a:tr>
+              <a:tr h="640854">
+                <a:tc>
+                  <a:txBody>
+                    <a:bodyPr/>
+                    <a:lstStyle/>
+                    <a:p>
+                      <a:pPr algn="l">
+                        <a:lnSpc>
+                          <a:spcPts val="2700"/>
+                        </a:lnSpc>
+                      </a:pPr>
+                      <a:r>
+                        <a:rPr sz="1800" b="0">
+                          <a:solidFill>
+                            <a:schemeClr val="tx1"/>
+                          </a:solidFill>
+                          <a:latin typeface="+mn-lt"/>
+                          <a:ea typeface="+mn-ea"/>
+                        </a:rPr>
+                        <a:t>소셜</a:t>
+                      </a:r>
+                    </a:p>
+                  </a:txBody>
+                  <a:tcPr marL="114300" marR="114300" marT="76200" marB="76200" anchor="t">
+                    <a:lnL w="9525">
+                      <a:solidFill>
+                        <a:schemeClr val="tx2"/>
+                      </a:solidFill>
+                      <a:prstDash val="solid"/>
+                    </a:lnL>
+                    <a:lnR w="9525">
+                      <a:solidFill>
+                        <a:schemeClr val="tx2"/>
+                      </a:solidFill>
+                      <a:prstDash val="solid"/>
+                    </a:lnR>
+                    <a:lnT w="9525">
+                      <a:solidFill>
+                        <a:schemeClr val="tx2"/>
+                      </a:solidFill>
+                      <a:prstDash val="solid"/>
+                    </a:lnT>
+                    <a:lnB w="9525">
+                      <a:solidFill>
+                        <a:schemeClr val="tx2"/>
+                      </a:solidFill>
+                      <a:prstDash val="solid"/>
+                    </a:lnB>
+                    <a:noFill/>
+                  </a:tcPr>
+                </a:tc>
+                <a:tc>
+                  <a:txBody>
+                    <a:bodyPr/>
+                    <a:lstStyle/>
+                    <a:p>
+                      <a:pPr algn="r">
+                        <a:lnSpc>
+                          <a:spcPts val="2700"/>
+                        </a:lnSpc>
+                      </a:pPr>
+                      <a:r>
+                        <a:rPr sz="1800" b="0">
+                          <a:solidFill>
+                            <a:schemeClr val="tx1"/>
+                          </a:solidFill>
+                          <a:latin typeface="+mn-lt"/>
+                          <a:ea typeface="+mn-ea"/>
+                        </a:rPr>
+                        <a:t>141K</a:t>
+                      </a:r>
+                    </a:p>
+                  </a:txBody>
+                  <a:tcPr marL="114300" marR="114300" marT="76200" marB="76200" anchor="t">
+                    <a:lnL w="9525">
+                      <a:solidFill>
+                        <a:schemeClr val="tx2"/>
+                      </a:solidFill>
+                      <a:prstDash val="solid"/>
+                    </a:lnL>
+                    <a:lnR w="9525">
+                      <a:solidFill>
+                        <a:schemeClr val="tx2"/>
+                      </a:solidFill>
+                      <a:prstDash val="solid"/>
+                    </a:lnR>
+                    <a:lnT w="9525">
+                      <a:solidFill>
+                        <a:schemeClr val="tx2"/>
+                      </a:solidFill>
+                      <a:prstDash val="solid"/>
+                    </a:lnT>
+                    <a:lnB w="9525">
+                      <a:solidFill>
+                        <a:schemeClr val="tx2"/>
+                      </a:solidFill>
+                      <a:prstDash val="solid"/>
+                    </a:lnB>
+                    <a:noFill/>
+                  </a:tcPr>
+                </a:tc>
+                <a:tc>
+                  <a:txBody>
+                    <a:bodyPr/>
+                    <a:lstStyle/>
+                    <a:p>
+                      <a:pPr algn="r">
+                        <a:lnSpc>
+                          <a:spcPts val="2700"/>
+                        </a:lnSpc>
+                      </a:pPr>
+                      <a:r>
+                        <a:rPr sz="1800" b="0">
+                          <a:solidFill>
+                            <a:schemeClr val="tx1"/>
+                          </a:solidFill>
+                          <a:latin typeface="+mn-lt"/>
+                          <a:ea typeface="+mn-ea"/>
+                        </a:rPr>
+                        <a:t>2.9%</a:t>
+                      </a:r>
+                    </a:p>
+                  </a:txBody>
+                  <a:tcPr marL="114300" marR="114300" marT="76200" marB="76200" anchor="t">
+                    <a:lnL w="9525">
+                      <a:solidFill>
+                        <a:schemeClr val="tx2"/>
+                      </a:solidFill>
+                      <a:prstDash val="solid"/>
+                    </a:lnL>
+                    <a:lnR w="9525">
+                      <a:solidFill>
+                        <a:schemeClr val="tx2"/>
+                      </a:solidFill>
+                      <a:prstDash val="solid"/>
+                    </a:lnR>
+                    <a:lnT w="9525">
+                      <a:solidFill>
+                        <a:schemeClr val="tx2"/>
+                      </a:solidFill>
+                      <a:prstDash val="solid"/>
+                    </a:lnT>
+                    <a:lnB w="9525">
+                      <a:solidFill>
+                        <a:schemeClr val="tx2"/>
+                      </a:solidFill>
+                      <a:prstDash val="solid"/>
+                    </a:lnB>
+                    <a:noFill/>
+                  </a:tcPr>
+                </a:tc>
+                <a:tc>
+                  <a:txBody>
+                    <a:bodyPr/>
+                    <a:lstStyle/>
+                    <a:p>
+                      <a:pPr algn="r">
+                        <a:lnSpc>
+                          <a:spcPts val="2700"/>
+                        </a:lnSpc>
+                      </a:pPr>
+                      <a:r>
+                        <a:rPr sz="1800" b="0">
+                          <a:solidFill>
+                            <a:schemeClr val="tx1"/>
+                          </a:solidFill>
+                          <a:latin typeface="+mn-lt"/>
+                          <a:ea typeface="+mn-ea"/>
+                        </a:rPr>
+                        <a:t>9,400</a:t>
+                      </a:r>
+                    </a:p>
+                  </a:txBody>
+                  <a:tcPr marL="114300" marR="114300" marT="76200" marB="76200" anchor="t">
+                    <a:lnL w="9525">
+                      <a:solidFill>
+                        <a:schemeClr val="tx2"/>
+                      </a:solidFill>
+                      <a:prstDash val="solid"/>
+                    </a:lnL>
+                    <a:lnR w="9525">
+                      <a:solidFill>
+                        <a:schemeClr val="tx2"/>
+                      </a:solidFill>
+                      <a:prstDash val="solid"/>
+                    </a:lnR>
+                    <a:lnT w="9525">
+                      <a:solidFill>
+                        <a:schemeClr val="tx2"/>
+                      </a:solidFill>
+                      <a:prstDash val="solid"/>
+                    </a:lnT>
+                    <a:lnB w="9525">
+                      <a:solidFill>
+                        <a:schemeClr val="tx2"/>
+                      </a:solidFill>
+                      <a:prstDash val="solid"/>
+                    </a:lnB>
+                    <a:noFill/>
+                  </a:tcPr>
+                </a:tc>
+              </a:tr>
+              <a:tr h="640854">
+                <a:tc>
+                  <a:txBody>
+                    <a:bodyPr/>
+                    <a:lstStyle/>
+                    <a:p>
+                      <a:pPr algn="l">
+                        <a:lnSpc>
+                          <a:spcPts val="2700"/>
+                        </a:lnSpc>
+                      </a:pPr>
+                      <a:r>
+                        <a:rPr sz="1800" b="0">
+                          <a:solidFill>
+                            <a:schemeClr val="tx1"/>
+                          </a:solidFill>
+                          <a:latin typeface="+mn-lt"/>
+                          <a:ea typeface="+mn-ea"/>
+                        </a:rPr>
+                        <a:t>제휴</a:t>
+                      </a:r>
+                    </a:p>
+                  </a:txBody>
+                  <a:tcPr marL="114300" marR="114300" marT="76200" marB="76200" anchor="t">
+                    <a:lnL w="9525">
+                      <a:solidFill>
+                        <a:schemeClr val="tx2"/>
+                      </a:solidFill>
+                      <a:prstDash val="solid"/>
+                    </a:lnL>
+                    <a:lnR w="9525">
+                      <a:solidFill>
+                        <a:schemeClr val="tx2"/>
+                      </a:solidFill>
+                      <a:prstDash val="solid"/>
+                    </a:lnR>
+                    <a:lnT w="9525">
+                      <a:solidFill>
+                        <a:schemeClr val="tx2"/>
+                      </a:solidFill>
+                      <a:prstDash val="solid"/>
+                    </a:lnT>
+                    <a:lnB w="9525">
+                      <a:solidFill>
+                        <a:schemeClr val="tx2"/>
+                      </a:solidFill>
+                      <a:prstDash val="solid"/>
+                    </a:lnB>
+                    <a:solidFill>
+                      <a:schemeClr val="bg2"/>
+                    </a:solidFill>
+                  </a:tcPr>
+                </a:tc>
+                <a:tc>
+                  <a:txBody>
+                    <a:bodyPr/>
+                    <a:lstStyle/>
+                    <a:p>
+                      <a:pPr algn="r">
+                        <a:lnSpc>
+                          <a:spcPts val="2700"/>
+                        </a:lnSpc>
+                      </a:pPr>
+                      <a:r>
+                        <a:rPr sz="1800" b="0">
+                          <a:solidFill>
+                            <a:schemeClr val="tx1"/>
+                          </a:solidFill>
+                          <a:latin typeface="+mn-lt"/>
+                          <a:ea typeface="+mn-ea"/>
+                        </a:rPr>
+                        <a:t>63K</a:t>
+                      </a:r>
+                    </a:p>
+                  </a:txBody>
+                  <a:tcPr marL="114300" marR="114300" marT="76200" marB="76200" anchor="t">
+                    <a:lnL w="9525">
+                      <a:solidFill>
+                        <a:schemeClr val="tx2"/>
+                      </a:solidFill>
+                      <a:prstDash val="solid"/>
+                    </a:lnL>
+                    <a:lnR w="9525">
+                      <a:solidFill>
+                        <a:schemeClr val="tx2"/>
+                      </a:solidFill>
+                      <a:prstDash val="solid"/>
+                    </a:lnR>
+                    <a:lnT w="9525">
+                      <a:solidFill>
+                        <a:schemeClr val="tx2"/>
+                      </a:solidFill>
+                      <a:prstDash val="solid"/>
+                    </a:lnT>
+                    <a:lnB w="9525">
+                      <a:solidFill>
+                        <a:schemeClr val="tx2"/>
+                      </a:solidFill>
+                      <a:prstDash val="solid"/>
+                    </a:lnB>
+                    <a:solidFill>
+                      <a:schemeClr val="bg2"/>
+                    </a:solidFill>
+                  </a:tcPr>
+                </a:tc>
+                <a:tc>
+                  <a:txBody>
+                    <a:bodyPr/>
+                    <a:lstStyle/>
+                    <a:p>
+                      <a:pPr algn="r">
+                        <a:lnSpc>
+                          <a:spcPts val="2700"/>
+                        </a:lnSpc>
+                      </a:pPr>
+                      <a:r>
+                        <a:rPr sz="1800" b="0">
+                          <a:solidFill>
+                            <a:schemeClr val="tx1"/>
+                          </a:solidFill>
+                          <a:latin typeface="+mn-lt"/>
+                          <a:ea typeface="+mn-ea"/>
+                        </a:rPr>
+                        <a:t>3.5%</a:t>
+                      </a:r>
+                    </a:p>
+                  </a:txBody>
+                  <a:tcPr marL="114300" marR="114300" marT="76200" marB="76200" anchor="t">
+                    <a:lnL w="9525">
+                      <a:solidFill>
+                        <a:schemeClr val="tx2"/>
+                      </a:solidFill>
+                      <a:prstDash val="solid"/>
+                    </a:lnL>
+                    <a:lnR w="9525">
+                      <a:solidFill>
+                        <a:schemeClr val="tx2"/>
+                      </a:solidFill>
+                      <a:prstDash val="solid"/>
+                    </a:lnR>
+                    <a:lnT w="9525">
+                      <a:solidFill>
+                        <a:schemeClr val="tx2"/>
+                      </a:solidFill>
+                      <a:prstDash val="solid"/>
+                    </a:lnT>
+                    <a:lnB w="9525">
+                      <a:solidFill>
+                        <a:schemeClr val="tx2"/>
+                      </a:solidFill>
+                      <a:prstDash val="solid"/>
+                    </a:lnB>
+                    <a:solidFill>
+                      <a:schemeClr val="bg2"/>
+                    </a:solidFill>
+                  </a:tcPr>
+                </a:tc>
+                <a:tc>
+                  <a:txBody>
+                    <a:bodyPr/>
+                    <a:lstStyle/>
+                    <a:p>
+                      <a:pPr algn="r">
+                        <a:lnSpc>
+                          <a:spcPts val="2700"/>
+                        </a:lnSpc>
+                      </a:pPr>
+                      <a:r>
+                        <a:rPr sz="1800" b="0">
+                          <a:solidFill>
+                            <a:schemeClr val="tx1"/>
+                          </a:solidFill>
+                          <a:latin typeface="+mn-lt"/>
+                          <a:ea typeface="+mn-ea"/>
+                        </a:rPr>
+                        <a:t>7,100</a:t>
+                      </a:r>
+                    </a:p>
+                  </a:txBody>
+                  <a:tcPr marL="114300" marR="114300" marT="76200" marB="76200" anchor="t">
+                    <a:lnL w="9525">
+                      <a:solidFill>
+                        <a:schemeClr val="tx2"/>
+                      </a:solidFill>
+                      <a:prstDash val="solid"/>
+                    </a:lnL>
+                    <a:lnR w="9525">
+                      <a:solidFill>
+                        <a:schemeClr val="tx2"/>
+                      </a:solidFill>
+                      <a:prstDash val="solid"/>
+                    </a:lnR>
+                    <a:lnT w="9525">
+                      <a:solidFill>
+                        <a:schemeClr val="tx2"/>
+                      </a:solidFill>
+                      <a:prstDash val="solid"/>
+                    </a:lnT>
+                    <a:lnB w="9525">
+                      <a:solidFill>
+                        <a:schemeClr val="tx2"/>
+                      </a:solidFill>
+                      <a:prstDash val="solid"/>
+                    </a:lnB>
+                    <a:solidFill>
+                      <a:schemeClr val="bg2"/>
+                    </a:solidFill>
+                  </a:tcPr>
+                </a:tc>
+              </a:tr>
+              <a:tr h="640854">
+                <a:tc>
+                  <a:txBody>
+                    <a:bodyPr/>
+                    <a:lstStyle/>
+                    <a:p>
+                      <a:pPr algn="l">
+                        <a:lnSpc>
+                          <a:spcPts val="2700"/>
+                        </a:lnSpc>
+                      </a:pPr>
+                      <a:r>
+                        <a:rPr sz="1800" b="0">
+                          <a:solidFill>
+                            <a:schemeClr val="tx1"/>
+                          </a:solidFill>
+                          <a:latin typeface="+mn-lt"/>
+                          <a:ea typeface="+mn-ea"/>
+                        </a:rPr>
+                        <a:t>디스플레이 광고</a:t>
+                      </a:r>
+                    </a:p>
+                  </a:txBody>
+                  <a:tcPr marL="114300" marR="114300" marT="76200" marB="76200" anchor="t">
+                    <a:lnL w="9525">
+                      <a:solidFill>
+                        <a:schemeClr val="tx2"/>
+                      </a:solidFill>
+                      <a:prstDash val="solid"/>
+                    </a:lnL>
+                    <a:lnR w="9525">
+                      <a:solidFill>
+                        <a:schemeClr val="tx2"/>
+                      </a:solidFill>
+                      <a:prstDash val="solid"/>
+                    </a:lnR>
+                    <a:lnT w="9525">
+                      <a:solidFill>
+                        <a:schemeClr val="tx2"/>
+                      </a:solidFill>
+                      <a:prstDash val="solid"/>
+                    </a:lnT>
+                    <a:lnB w="9525">
+                      <a:solidFill>
+                        <a:schemeClr val="tx2"/>
+                      </a:solidFill>
+                      <a:prstDash val="solid"/>
+                    </a:lnB>
+                    <a:noFill/>
+                  </a:tcPr>
+                </a:tc>
+                <a:tc>
+                  <a:txBody>
+                    <a:bodyPr/>
+                    <a:lstStyle/>
+                    <a:p>
+                      <a:pPr algn="r">
+                        <a:lnSpc>
+                          <a:spcPts val="2700"/>
+                        </a:lnSpc>
+                      </a:pPr>
+                      <a:r>
+                        <a:rPr sz="1800" b="0">
+                          <a:solidFill>
+                            <a:schemeClr val="tx1"/>
+                          </a:solidFill>
+                          <a:latin typeface="+mn-lt"/>
+                          <a:ea typeface="+mn-ea"/>
+                        </a:rPr>
+                        <a:t>38K</a:t>
+                      </a:r>
+                    </a:p>
+                  </a:txBody>
+                  <a:tcPr marL="114300" marR="114300" marT="76200" marB="76200" anchor="t">
+                    <a:lnL w="9525">
+                      <a:solidFill>
+                        <a:schemeClr val="tx2"/>
+                      </a:solidFill>
+                      <a:prstDash val="solid"/>
+                    </a:lnL>
+                    <a:lnR w="9525">
+                      <a:solidFill>
+                        <a:schemeClr val="tx2"/>
+                      </a:solidFill>
+                      <a:prstDash val="solid"/>
+                    </a:lnR>
+                    <a:lnT w="9525">
+                      <a:solidFill>
+                        <a:schemeClr val="tx2"/>
+                      </a:solidFill>
+                      <a:prstDash val="solid"/>
+                    </a:lnT>
+                    <a:lnB w="9525">
+                      <a:solidFill>
+                        <a:schemeClr val="tx2"/>
+                      </a:solidFill>
+                      <a:prstDash val="solid"/>
+                    </a:lnB>
+                    <a:noFill/>
+                  </a:tcPr>
+                </a:tc>
+                <a:tc>
+                  <a:txBody>
+                    <a:bodyPr/>
+                    <a:lstStyle/>
+                    <a:p>
+                      <a:pPr algn="r">
+                        <a:lnSpc>
+                          <a:spcPts val="2700"/>
+                        </a:lnSpc>
+                      </a:pPr>
+                      <a:r>
+                        <a:rPr sz="1800" b="0">
+                          <a:solidFill>
+                            <a:schemeClr val="tx1"/>
+                          </a:solidFill>
+                          <a:latin typeface="+mn-lt"/>
+                          <a:ea typeface="+mn-ea"/>
+                        </a:rPr>
+                        <a:t>1.1%</a:t>
+                      </a:r>
+                    </a:p>
+                  </a:txBody>
+                  <a:tcPr marL="114300" marR="114300" marT="76200" marB="76200" anchor="t">
+                    <a:lnL w="9525">
+                      <a:solidFill>
+                        <a:schemeClr val="tx2"/>
+                      </a:solidFill>
+                      <a:prstDash val="solid"/>
+                    </a:lnL>
+                    <a:lnR w="9525">
+                      <a:solidFill>
+                        <a:schemeClr val="tx2"/>
+                      </a:solidFill>
+                      <a:prstDash val="solid"/>
+                    </a:lnR>
+                    <a:lnT w="9525">
+                      <a:solidFill>
+                        <a:schemeClr val="tx2"/>
+                      </a:solidFill>
+                      <a:prstDash val="solid"/>
+                    </a:lnT>
+                    <a:lnB w="9525">
+                      <a:solidFill>
+                        <a:schemeClr val="tx2"/>
+                      </a:solidFill>
+                      <a:prstDash val="solid"/>
+                    </a:lnB>
+                    <a:noFill/>
+                  </a:tcPr>
+                </a:tc>
+                <a:tc>
+                  <a:txBody>
+                    <a:bodyPr/>
+                    <a:lstStyle/>
+                    <a:p>
+                      <a:pPr algn="r">
+                        <a:lnSpc>
+                          <a:spcPts val="2700"/>
+                        </a:lnSpc>
+                      </a:pPr>
+                      <a:r>
+                        <a:rPr sz="1800" b="0">
+                          <a:solidFill>
+                            <a:schemeClr val="tx1"/>
+                          </a:solidFill>
+                          <a:latin typeface="+mn-lt"/>
+                          <a:ea typeface="+mn-ea"/>
+                        </a:rPr>
+                        <a:t>21,500</a:t>
+                      </a:r>
+                    </a:p>
+                  </a:txBody>
+                  <a:tcPr marL="114300" marR="114300" marT="76200" marB="76200" anchor="t">
+                    <a:lnL w="9525">
+                      <a:solidFill>
+                        <a:schemeClr val="tx2"/>
+                      </a:solidFill>
+                      <a:prstDash val="solid"/>
+                    </a:lnL>
+                    <a:lnR w="9525">
+                      <a:solidFill>
+                        <a:schemeClr val="tx2"/>
+                      </a:solidFill>
+                      <a:prstDash val="solid"/>
+                    </a:lnR>
+                    <a:lnT w="9525">
+                      <a:solidFill>
+                        <a:schemeClr val="tx2"/>
+                      </a:solidFill>
+                      <a:prstDash val="solid"/>
+                    </a:lnT>
+                    <a:lnB w="9525">
+                      <a:solidFill>
+                        <a:schemeClr val="tx2"/>
+                      </a:solidFill>
+                      <a:prstDash val="solid"/>
+                    </a:lnB>
+                    <a:noFill/>
+                  </a:tcPr>
+                </a:tc>
+              </a:tr>
+              <a:tr h="646063">
+                <a:tc>
+                  <a:txBody>
+                    <a:bodyPr/>
+                    <a:lstStyle/>
+                    <a:p>
+                      <a:pPr algn="l">
+                        <a:lnSpc>
+                          <a:spcPts val="2700"/>
+                        </a:lnSpc>
+                      </a:pPr>
+                      <a:r>
+                        <a:rPr sz="1800" b="1" i="0" u="none">
+                          <a:solidFill>
+                            <a:schemeClr val="tx1"/>
+                          </a:solidFill>
+                          <a:latin typeface="+mn-lt"/>
+                          <a:ea typeface="+mn-ea"/>
+                        </a:rPr>
+                        <a:t>합계</a:t>
+                      </a:r>
+                    </a:p>
+                  </a:txBody>
+                  <a:tcPr marL="114300" marR="114300" marT="76200" marB="76200" anchor="t">
+                    <a:lnL w="9525">
+                      <a:solidFill>
+                        <a:schemeClr val="tx2"/>
+                      </a:solidFill>
+                      <a:prstDash val="solid"/>
+                    </a:lnL>
+                    <a:lnR w="9525">
+                      <a:solidFill>
+                        <a:schemeClr val="tx2"/>
+                      </a:solidFill>
+                      <a:prstDash val="solid"/>
+                    </a:lnR>
+                    <a:lnT w="9525">
+                      <a:solidFill>
+                        <a:schemeClr val="tx2"/>
+                      </a:solidFill>
+                      <a:prstDash val="solid"/>
+                    </a:lnT>
+                    <a:lnB w="9525">
+                      <a:solidFill>
+                        <a:schemeClr val="tx2"/>
+                      </a:solidFill>
+                      <a:prstDash val="solid"/>
+                    </a:lnB>
+                    <a:solidFill>
+                      <a:schemeClr val="bg2"/>
+                    </a:solidFill>
+                  </a:tcPr>
+                </a:tc>
+                <a:tc>
+                  <a:txBody>
+                    <a:bodyPr/>
+                    <a:lstStyle/>
+                    <a:p>
+                      <a:pPr algn="r">
+                        <a:lnSpc>
+                          <a:spcPts val="2700"/>
+                        </a:lnSpc>
+                      </a:pPr>
+                      <a:r>
+                        <a:rPr sz="1800" b="1" i="0" u="none">
+                          <a:solidFill>
+                            <a:schemeClr val="tx1"/>
+                          </a:solidFill>
+                          <a:latin typeface="+mn-lt"/>
+                          <a:ea typeface="+mn-ea"/>
+                        </a:rPr>
+                        <a:t>822K</a:t>
+                      </a:r>
+                    </a:p>
+                  </a:txBody>
+                  <a:tcPr marL="114300" marR="114300" marT="76200" marB="76200" anchor="t">
+                    <a:lnL w="9525">
+                      <a:solidFill>
+                        <a:schemeClr val="tx2"/>
+                      </a:solidFill>
+                      <a:prstDash val="solid"/>
+                    </a:lnL>
+                    <a:lnR w="9525">
+                      <a:solidFill>
+                        <a:schemeClr val="tx2"/>
+                      </a:solidFill>
+                      <a:prstDash val="solid"/>
+                    </a:lnR>
+                    <a:lnT w="9525">
+                      <a:solidFill>
+                        <a:schemeClr val="tx2"/>
+                      </a:solidFill>
+                      <a:prstDash val="solid"/>
+                    </a:lnT>
+                    <a:lnB w="9525">
+                      <a:solidFill>
+                        <a:schemeClr val="tx2"/>
+                      </a:solidFill>
+                      <a:prstDash val="solid"/>
+                    </a:lnB>
+                    <a:solidFill>
+                      <a:schemeClr val="bg2"/>
+                    </a:solidFill>
+                  </a:tcPr>
+                </a:tc>
+                <a:tc>
+                  <a:txBody>
+                    <a:bodyPr/>
+                    <a:lstStyle/>
+                    <a:p>
+                      <a:pPr algn="r">
+                        <a:lnSpc>
+                          <a:spcPts val="2700"/>
+                        </a:lnSpc>
+                      </a:pPr>
+                      <a:r>
+                        <a:rPr sz="1800" b="1" i="0" u="none">
+                          <a:solidFill>
+                            <a:schemeClr val="tx1"/>
+                          </a:solidFill>
+                          <a:latin typeface="+mn-lt"/>
+                          <a:ea typeface="+mn-ea"/>
+                        </a:rPr>
+                        <a:t>4.6%</a:t>
+                      </a:r>
+                    </a:p>
+                  </a:txBody>
+                  <a:tcPr marL="114300" marR="114300" marT="76200" marB="76200" anchor="t">
+                    <a:lnL w="9525">
+                      <a:solidFill>
+                        <a:schemeClr val="tx2"/>
+                      </a:solidFill>
+                      <a:prstDash val="solid"/>
+                    </a:lnL>
+                    <a:lnR w="9525">
+                      <a:solidFill>
+                        <a:schemeClr val="tx2"/>
+                      </a:solidFill>
+                      <a:prstDash val="solid"/>
+                    </a:lnR>
+                    <a:lnT w="9525">
+                      <a:solidFill>
+                        <a:schemeClr val="tx2"/>
+                      </a:solidFill>
+                      <a:prstDash val="solid"/>
+                    </a:lnT>
+                    <a:lnB w="9525">
+                      <a:solidFill>
+                        <a:schemeClr val="tx2"/>
+                      </a:solidFill>
+                      <a:prstDash val="solid"/>
+                    </a:lnB>
+                    <a:solidFill>
+                      <a:schemeClr val="bg2"/>
+                    </a:solidFill>
+                  </a:tcPr>
+                </a:tc>
+                <a:tc>
+                  <a:txBody>
+                    <a:bodyPr/>
+                    <a:lstStyle/>
+                    <a:p>
+                      <a:pPr algn="r">
+                        <a:lnSpc>
+                          <a:spcPts val="2700"/>
+                        </a:lnSpc>
+                      </a:pPr>
+                      <a:r>
+                        <a:rPr sz="1800" b="1" i="0" u="none">
+                          <a:solidFill>
+                            <a:schemeClr val="tx1"/>
+                          </a:solidFill>
+                          <a:latin typeface="+mn-lt"/>
+                          <a:ea typeface="+mn-ea"/>
+                        </a:rPr>
+                        <a:t>8,900</a:t>
+                      </a:r>
+                    </a:p>
+                  </a:txBody>
+                  <a:tcPr marL="114300" marR="114300" marT="76200" marB="76200" anchor="t">
+                    <a:lnL w="9525">
+                      <a:solidFill>
+                        <a:schemeClr val="tx2"/>
+                      </a:solidFill>
+                      <a:prstDash val="solid"/>
+                    </a:lnL>
+                    <a:lnR w="9525">
+                      <a:solidFill>
+                        <a:schemeClr val="tx2"/>
+                      </a:solidFill>
+                      <a:prstDash val="solid"/>
+                    </a:lnR>
+                    <a:lnT w="9525">
+                      <a:solidFill>
+                        <a:schemeClr val="tx2"/>
+                      </a:solidFill>
+                      <a:prstDash val="solid"/>
+                    </a:lnT>
+                    <a:lnB w="9525">
+                      <a:solidFill>
+                        <a:schemeClr val="tx2"/>
+                      </a:solidFill>
+                      <a:prstDash val="solid"/>
+                    </a:lnB>
+                    <a:solidFill>
+                      <a:schemeClr val="bg2"/>
+                    </a:solidFill>
+                  </a:tcPr>
+                </a:tc>
+              </a:tr>
             </a:tbl>
           </a:graphicData>
         </a:graphic>
       </p:graphicFrame>
+      <p:sp>
+        <p:nvSpPr>
+          <p:cNvPr id="4" name="shape s3.1.1"/>
+          <p:cNvSpPr/>
+          <p:nvPr/>
+        </p:nvSpPr>
+        <p:spPr>
+          <a:xfrm>
+            <a:off x="8039100" y="1283940"/>
+            <a:ext cx="3543300" cy="4495949"/>
+          </a:xfrm>
+          <a:prstGeom prst="roundRect">
+            <a:avLst>
+              <a:gd name="adj" fmla="val 6452"/>
+            </a:avLst>
+          </a:prstGeom>
+          <a:solidFill>
+            <a:schemeClr val="bg2"/>
+          </a:solidFill>
+          <a:ln>
+            <a:noFill/>
+          </a:ln>
+        </p:spPr>
+        <p:txBody>
+          <a:bodyPr wrap="square" lIns="342900" tIns="342900" rIns="342900" bIns="342900" anchor="t">
+            <a:normAutofit/>
+          </a:bodyPr>
+          <a:lstStyle/>
+          <a:p/>
+        </p:txBody>
+      </p:sp>
+      <p:sp>
+        <p:nvSpPr>
+          <p:cNvPr id="5" name="text s3.1.1.0.0.0"/>
+          <p:cNvSpPr txBox="1"/>
+          <p:nvPr/>
+        </p:nvSpPr>
+        <p:spPr>
+          <a:xfrm>
+            <a:off x="8448824" y="1693664"/>
+            <a:ext cx="2723852" cy="257175"/>
+          </a:xfrm>
+          <a:prstGeom prst="rect">
+            <a:avLst/>
+          </a:prstGeom>
+          <a:noFill/>
+          <a:ln>
+            <a:noFill/>
+          </a:ln>
+        </p:spPr>
+        <p:txBody>
+          <a:bodyPr wrap="square" lIns="0" tIns="0" rIns="0" bIns="0" anchor="t">
+            <a:normAutofit/>
+          </a:bodyPr>
+          <a:lstStyle/>
+          <a:p>
+            <a:pPr algn="l">
+              <a:lnSpc>
+                <a:spcPts val="2025"/>
+              </a:lnSpc>
+            </a:pPr>
+            <a:r>
+              <a:rPr sz="1350" b="1">
+                <a:solidFill>
+                  <a:schemeClr val="accent1"/>
+                </a:solidFill>
+                <a:latin typeface="+mn-lt"/>
+                <a:ea typeface="+mn-ea"/>
+              </a:rPr>
+              <a:t>읽는 법</a:t>
+            </a:r>
+          </a:p>
+        </p:txBody>
+      </p:sp>
+      <p:sp>
+        <p:nvSpPr>
+          <p:cNvPr id="6" name="ul s3.1.1.0.0.1"/>
+          <p:cNvSpPr txBox="1"/>
+          <p:nvPr/>
+        </p:nvSpPr>
+        <p:spPr>
+          <a:xfrm>
+            <a:off x="8448824" y="2179439"/>
+            <a:ext cx="2723852" cy="1571625"/>
+          </a:xfrm>
+          <a:prstGeom prst="rect">
+            <a:avLst/>
+          </a:prstGeom>
+          <a:noFill/>
+          <a:ln>
+            <a:noFill/>
+          </a:ln>
+        </p:spPr>
+        <p:txBody>
+          <a:bodyPr wrap="square" lIns="0" tIns="0" rIns="0" bIns="0" anchor="t">
+            <a:normAutofit/>
+          </a:bodyPr>
+          <a:lstStyle/>
+          <a:p>
+            <a:pPr marL="342900" indent="-342900" algn="l">
+              <a:lnSpc>
+                <a:spcPts val="2475"/>
+              </a:lnSpc>
+              <a:buFont typeface="+mn-lt"/>
+              <a:buChar char="•"/>
+            </a:pPr>
+            <a:r>
+              <a:rPr sz="1650" b="1" i="0" u="none">
+                <a:solidFill>
+                  <a:schemeClr val="tx1"/>
+                </a:solidFill>
+                <a:latin typeface="+mn-lt"/>
+                <a:ea typeface="+mn-ea"/>
+              </a:rPr>
+              <a:t>추천</a:t>
+            </a:r>
+            <a:r>
+              <a:rPr sz="1650" b="0">
+                <a:solidFill>
+                  <a:schemeClr val="tx1"/>
+                </a:solidFill>
+                <a:latin typeface="+mn-lt"/>
+                <a:ea typeface="+mn-ea"/>
+              </a:rPr>
+              <a:t>은 전환율 1위, CAC 최저</a:t>
+            </a:r>
+          </a:p>
+          <a:p>
+            <a:pPr marL="342900" indent="-342900" algn="l">
+              <a:lnSpc>
+                <a:spcPts val="2475"/>
+              </a:lnSpc>
+              <a:buFont typeface="+mn-lt"/>
+              <a:buChar char="•"/>
+            </a:pPr>
+            <a:r>
+              <a:rPr sz="1650" b="1" i="0" u="none">
+                <a:solidFill>
+                  <a:schemeClr val="tx1"/>
+                </a:solidFill>
+                <a:latin typeface="+mn-lt"/>
+                <a:ea typeface="+mn-ea"/>
+              </a:rPr>
+              <a:t>검색</a:t>
+            </a:r>
+            <a:r>
+              <a:rPr sz="1650" b="0">
+                <a:solidFill>
+                  <a:schemeClr val="tx1"/>
+                </a:solidFill>
+                <a:latin typeface="+mn-lt"/>
+                <a:ea typeface="+mn-ea"/>
+              </a:rPr>
+              <a:t>은 규모 1위지만 CAC가 추천의 4배</a:t>
+            </a:r>
+          </a:p>
+          <a:p>
+            <a:pPr marL="342900" indent="-342900" algn="l">
+              <a:lnSpc>
+                <a:spcPts val="2475"/>
+              </a:lnSpc>
+              <a:buFont typeface="+mn-lt"/>
+              <a:buChar char="•"/>
+            </a:pPr>
+            <a:r>
+              <a:rPr sz="1650" b="1" i="0" u="none">
+                <a:solidFill>
+                  <a:schemeClr val="tx1"/>
+                </a:solidFill>
+                <a:latin typeface="+mn-lt"/>
+                <a:ea typeface="+mn-ea"/>
+              </a:rPr>
+              <a:t>디스플레이</a:t>
+            </a:r>
+            <a:r>
+              <a:rPr sz="1650" b="0">
+                <a:solidFill>
+                  <a:schemeClr val="tx1"/>
+                </a:solidFill>
+                <a:latin typeface="+mn-lt"/>
+                <a:ea typeface="+mn-ea"/>
+              </a:rPr>
+              <a:t>는 CAC가 평균의 2.4배</a:t>
+            </a:r>
+          </a:p>
+        </p:txBody>
+      </p:sp>
+      <p:sp>
+        <p:nvSpPr>
+          <p:cNvPr id="7" name="text s3.1.1.0.1"/>
+          <p:cNvSpPr txBox="1"/>
+          <p:nvPr/>
+        </p:nvSpPr>
+        <p:spPr>
+          <a:xfrm>
+            <a:off x="8448824" y="4726335"/>
+            <a:ext cx="2723852" cy="643830"/>
+          </a:xfrm>
+          <a:prstGeom prst="rect">
+            <a:avLst/>
+          </a:prstGeom>
+          <a:noFill/>
+          <a:ln>
+            <a:noFill/>
+          </a:ln>
+        </p:spPr>
+        <p:txBody>
+          <a:bodyPr wrap="square" lIns="0" tIns="0" rIns="0" bIns="0" anchor="t">
+            <a:normAutofit/>
+          </a:bodyPr>
+          <a:lstStyle/>
+          <a:p>
+            <a:pPr algn="l">
+              <a:lnSpc>
+                <a:spcPts val="2535"/>
+              </a:lnSpc>
+            </a:pPr>
+            <a:r>
+              <a:rPr sz="1950" b="1">
+                <a:solidFill>
+                  <a:schemeClr val="accent1"/>
+                </a:solidFill>
+                <a:latin typeface="+mj-lt"/>
+                <a:ea typeface="+mj-ea"/>
+              </a:rPr>
+              <a:t>→ 디스플레이 예산을 추천으로</a:t>
+            </a:r>
+          </a:p>
+        </p:txBody>
+      </p:sp>
+      <p:sp>
+        <p:nvSpPr>
+          <p:cNvPr id="8" name="text s3.2"/>
+          <p:cNvSpPr txBox="1"/>
+          <p:nvPr/>
+        </p:nvSpPr>
+        <p:spPr>
+          <a:xfrm>
+            <a:off x="609600" y="6008489"/>
+            <a:ext cx="10972800" cy="239911"/>
+          </a:xfrm>
+          <a:prstGeom prst="rect">
+            <a:avLst/>
+          </a:prstGeom>
+          <a:noFill/>
+          <a:ln>
+            <a:noFill/>
+          </a:ln>
+        </p:spPr>
+        <p:txBody>
+          <a:bodyPr wrap="square" lIns="0" tIns="0" rIns="0" bIns="0" anchor="t">
+            <a:normAutofit/>
+          </a:bodyPr>
+          <a:lstStyle/>
+          <a:p>
+            <a:pPr algn="l">
+              <a:lnSpc>
+                <a:spcPts val="1890"/>
+              </a:lnSpc>
+            </a:pPr>
+            <a:r>
+              <a:rPr sz="1350" b="0">
+                <a:solidFill>
+                  <a:schemeClr val="tx2"/>
+                </a:solidFill>
+                <a:latin typeface="+mn-lt"/>
+                <a:ea typeface="+mn-ea"/>
+              </a:rPr>
+              <a:t>CAC = 채널 비용 ÷ 신규 사용자. 합계 행의 전환율과 CAC는 가중 평균이다.</a:t>
+            </a:r>
+          </a:p>
+        </p:txBody>
+      </p:sp>
     </p:spTree>
   </p:cSld>
   <p:clrMapOvr>
@@ -1627,11 +4090,11 @@
         <p:spPr>
           <a:xfrm>
             <a:off x="609600" y="1283940"/>
-            <a:ext cx="10972800" cy="3048000"/>
+            <a:ext cx="10972800" cy="3642122"/>
           </a:xfrm>
           <a:prstGeom prst="roundRect">
             <a:avLst>
-              <a:gd name="adj" fmla="val 7500"/>
+              <a:gd name="adj" fmla="val 6277"/>
             </a:avLst>
           </a:prstGeom>
           <a:gradFill>
@@ -1662,36 +4125,36 @@
       </p:sp>
       <p:sp>
         <p:nvSpPr>
-          <p:cNvPr id="4" name="text s4.1.1"/>
-          <p:cNvSpPr txBox="1"/>
-          <p:nvPr/>
-        </p:nvSpPr>
-        <p:spPr>
-          <a:xfrm>
-            <a:off x="4024164" y="2584996"/>
-            <a:ext cx="4143673" cy="445740"/>
-          </a:xfrm>
-          <a:prstGeom prst="rect">
-            <a:avLst/>
-          </a:prstGeom>
-          <a:noFill/>
-          <a:ln>
-            <a:noFill/>
-          </a:ln>
-        </p:spPr>
-        <p:txBody>
-          <a:bodyPr wrap="square" lIns="0" tIns="0" rIns="0" bIns="0" anchor="t">
-            <a:normAutofit/>
-          </a:bodyPr>
-          <a:lstStyle/>
-          <a:p>
-            <a:pPr algn="l">
-              <a:lnSpc>
-                <a:spcPts val="3510"/>
-              </a:lnSpc>
-            </a:pPr>
-            <a:r>
-              <a:rPr sz="2700" b="1">
+          <p:cNvPr id="4" name="text s4.1.1.0"/>
+          <p:cNvSpPr txBox="1"/>
+          <p:nvPr/>
+        </p:nvSpPr>
+        <p:spPr>
+          <a:xfrm>
+            <a:off x="3103364" y="2589758"/>
+            <a:ext cx="5985272" cy="594271"/>
+          </a:xfrm>
+          <a:prstGeom prst="rect">
+            <a:avLst/>
+          </a:prstGeom>
+          <a:noFill/>
+          <a:ln>
+            <a:noFill/>
+          </a:ln>
+        </p:spPr>
+        <p:txBody>
+          <a:bodyPr wrap="square" lIns="0" tIns="0" rIns="0" bIns="0" anchor="t">
+            <a:normAutofit/>
+          </a:bodyPr>
+          <a:lstStyle/>
+          <a:p>
+            <a:pPr algn="ctr">
+              <a:lnSpc>
+                <a:spcPts val="4680"/>
+              </a:lnSpc>
+            </a:pPr>
+            <a:r>
+              <a:rPr sz="3900" b="1">
                 <a:solidFill>
                   <a:schemeClr val="bg1"/>
                 </a:solidFill>
@@ -1705,7 +4168,50 @@
       </p:sp>
       <p:sp>
         <p:nvSpPr>
-          <p:cNvPr id="5" name="shape s4.1.2"/>
+          <p:cNvPr id="5" name="text s4.1.1.1"/>
+          <p:cNvSpPr txBox="1"/>
+          <p:nvPr/>
+        </p:nvSpPr>
+        <p:spPr>
+          <a:xfrm>
+            <a:off x="3103364" y="3298329"/>
+            <a:ext cx="5985272" cy="321915"/>
+          </a:xfrm>
+          <a:prstGeom prst="rect">
+            <a:avLst/>
+          </a:prstGeom>
+          <a:noFill/>
+          <a:ln>
+            <a:noFill/>
+          </a:ln>
+        </p:spPr>
+        <p:txBody>
+          <a:bodyPr wrap="square" lIns="0" tIns="0" rIns="0" bIns="0" anchor="t">
+            <a:normAutofit/>
+          </a:bodyPr>
+          <a:lstStyle/>
+          <a:p>
+            <a:pPr algn="ctr">
+              <a:lnSpc>
+                <a:spcPts val="2535"/>
+              </a:lnSpc>
+            </a:pPr>
+            <a:r>
+              <a:rPr sz="1950" b="1">
+                <a:solidFill>
+                  <a:schemeClr val="bg1"/>
+                </a:solidFill>
+                <a:latin typeface="+mj-lt"/>
+                <a:ea typeface="+mj-ea"/>
+              </a:rPr>
+              <a:t>같은 예산이면 사용자가 네 배 온다</a:t>
+            </a:r>
+          </a:p>
+        </p:txBody>
+      </p:sp>
+      <p:sp>
+        <p:nvSpPr>
+          <p:cNvPr id="6" name="shape s4.1.2"/>
           <p:cNvSpPr/>
           <p:nvPr/>
         </p:nvSpPr>
@@ -1749,6 +4255,240 @@
                 <a:ea typeface="+mn-ea"/>
               </a:rPr>
               <a:t>NEW</a:t>
+            </a:r>
+          </a:p>
+        </p:txBody>
+      </p:sp>
+      <p:sp>
+        <p:nvSpPr>
+          <p:cNvPr id="7" name="shape s4.2.0"/>
+          <p:cNvSpPr/>
+          <p:nvPr/>
+        </p:nvSpPr>
+        <p:spPr>
+          <a:xfrm>
+            <a:off x="609600" y="5154662"/>
+            <a:ext cx="5314950" cy="1093738"/>
+          </a:xfrm>
+          <a:prstGeom prst="roundRect">
+            <a:avLst>
+              <a:gd name="adj" fmla="val 20901"/>
+            </a:avLst>
+          </a:prstGeom>
+          <a:solidFill>
+            <a:schemeClr val="bg2"/>
+          </a:solidFill>
+          <a:ln>
+            <a:noFill/>
+          </a:ln>
+        </p:spPr>
+        <p:txBody>
+          <a:bodyPr wrap="square" lIns="228600" tIns="228600" rIns="228600" bIns="228600" anchor="t">
+            <a:normAutofit/>
+          </a:bodyPr>
+          <a:lstStyle/>
+          <a:p/>
+        </p:txBody>
+      </p:sp>
+      <p:sp>
+        <p:nvSpPr>
+          <p:cNvPr id="8" name="text s4.2.0.0.0"/>
+          <p:cNvSpPr txBox="1"/>
+          <p:nvPr/>
+        </p:nvSpPr>
+        <p:spPr>
+          <a:xfrm>
+            <a:off x="905024" y="5530007"/>
+            <a:ext cx="849809" cy="342900"/>
+          </a:xfrm>
+          <a:prstGeom prst="rect">
+            <a:avLst/>
+          </a:prstGeom>
+          <a:noFill/>
+          <a:ln>
+            <a:noFill/>
+          </a:ln>
+        </p:spPr>
+        <p:txBody>
+          <a:bodyPr wrap="square" lIns="0" tIns="0" rIns="0" bIns="0" anchor="t">
+            <a:normAutofit/>
+          </a:bodyPr>
+          <a:lstStyle/>
+          <a:p>
+            <a:pPr algn="l">
+              <a:lnSpc>
+                <a:spcPts val="2700"/>
+              </a:lnSpc>
+            </a:pPr>
+            <a:r>
+              <a:rPr sz="1800" b="0">
+                <a:solidFill>
+                  <a:schemeClr val="tx1"/>
+                </a:solidFill>
+                <a:latin typeface="+mn-lt"/>
+                <a:ea typeface="+mn-ea"/>
+              </a:rPr>
+              <a:t>검색 CAC</a:t>
+            </a:r>
+          </a:p>
+        </p:txBody>
+      </p:sp>
+      <p:sp>
+        <p:nvSpPr>
+          <p:cNvPr id="9" name="text s4.2.0.0.1"/>
+          <p:cNvSpPr txBox="1"/>
+          <p:nvPr/>
+        </p:nvSpPr>
+        <p:spPr>
+          <a:xfrm>
+            <a:off x="3983236" y="5450086"/>
+            <a:ext cx="1645890" cy="502890"/>
+          </a:xfrm>
+          <a:prstGeom prst="rect">
+            <a:avLst/>
+          </a:prstGeom>
+          <a:noFill/>
+          <a:ln>
+            <a:noFill/>
+          </a:ln>
+        </p:spPr>
+        <p:txBody>
+          <a:bodyPr wrap="square" lIns="0" tIns="0" rIns="0" bIns="0" anchor="t">
+            <a:normAutofit/>
+          </a:bodyPr>
+          <a:lstStyle/>
+          <a:p>
+            <a:pPr algn="l">
+              <a:lnSpc>
+                <a:spcPts val="3960"/>
+              </a:lnSpc>
+            </a:pPr>
+            <a:r>
+              <a:rPr sz="3300" b="1">
+                <a:solidFill>
+                  <a:schemeClr val="tx1"/>
+                </a:solidFill>
+                <a:latin typeface="+mj-lt"/>
+                <a:ea typeface="+mj-ea"/>
+              </a:rPr>
+              <a:t>12,000원</a:t>
+            </a:r>
+          </a:p>
+        </p:txBody>
+      </p:sp>
+      <p:sp>
+        <p:nvSpPr>
+          <p:cNvPr id="10" name="shape s4.2.1"/>
+          <p:cNvSpPr/>
+          <p:nvPr/>
+        </p:nvSpPr>
+        <p:spPr>
+          <a:xfrm>
+            <a:off x="6267450" y="5154662"/>
+            <a:ext cx="5314950" cy="1093738"/>
+          </a:xfrm>
+          <a:prstGeom prst="roundRect">
+            <a:avLst>
+              <a:gd name="adj" fmla="val 20901"/>
+            </a:avLst>
+          </a:prstGeom>
+          <a:solidFill>
+            <a:schemeClr val="bg2"/>
+          </a:solidFill>
+          <a:ln>
+            <a:noFill/>
+          </a:ln>
+        </p:spPr>
+        <p:txBody>
+          <a:bodyPr wrap="square" lIns="228600" tIns="228600" rIns="228600" bIns="228600" anchor="t">
+            <a:normAutofit/>
+          </a:bodyPr>
+          <a:lstStyle/>
+          <a:p/>
+        </p:txBody>
+      </p:sp>
+      <p:sp>
+        <p:nvSpPr>
+          <p:cNvPr id="11" name="text s4.2.1.0.0"/>
+          <p:cNvSpPr txBox="1"/>
+          <p:nvPr/>
+        </p:nvSpPr>
+        <p:spPr>
+          <a:xfrm>
+            <a:off x="6562874" y="5530007"/>
+            <a:ext cx="849809" cy="342900"/>
+          </a:xfrm>
+          <a:prstGeom prst="rect">
+            <a:avLst/>
+          </a:prstGeom>
+          <a:noFill/>
+          <a:ln>
+            <a:noFill/>
+          </a:ln>
+        </p:spPr>
+        <p:txBody>
+          <a:bodyPr wrap="square" lIns="0" tIns="0" rIns="0" bIns="0" anchor="t">
+            <a:normAutofit/>
+          </a:bodyPr>
+          <a:lstStyle/>
+          <a:p>
+            <a:pPr algn="l">
+              <a:lnSpc>
+                <a:spcPts val="2700"/>
+              </a:lnSpc>
+            </a:pPr>
+            <a:r>
+              <a:rPr sz="1800" b="0">
+                <a:solidFill>
+                  <a:schemeClr val="tx1"/>
+                </a:solidFill>
+                <a:latin typeface="+mn-lt"/>
+                <a:ea typeface="+mn-ea"/>
+              </a:rPr>
+              <a:t>추천 CAC</a:t>
+            </a:r>
+          </a:p>
+        </p:txBody>
+      </p:sp>
+      <p:sp>
+        <p:nvSpPr>
+          <p:cNvPr id="12" name="text s4.2.1.0.1"/>
+          <p:cNvSpPr txBox="1"/>
+          <p:nvPr/>
+        </p:nvSpPr>
+        <p:spPr>
+          <a:xfrm>
+            <a:off x="9837241" y="5450086"/>
+            <a:ext cx="1449735" cy="502890"/>
+          </a:xfrm>
+          <a:prstGeom prst="rect">
+            <a:avLst/>
+          </a:prstGeom>
+          <a:noFill/>
+          <a:ln>
+            <a:noFill/>
+          </a:ln>
+        </p:spPr>
+        <p:txBody>
+          <a:bodyPr wrap="square" lIns="0" tIns="0" rIns="0" bIns="0" anchor="t">
+            <a:normAutofit/>
+          </a:bodyPr>
+          <a:lstStyle/>
+          <a:p>
+            <a:pPr algn="l">
+              <a:lnSpc>
+                <a:spcPts val="3960"/>
+              </a:lnSpc>
+            </a:pPr>
+            <a:r>
+              <a:rPr sz="3300" b="1">
+                <a:solidFill>
+                  <a:schemeClr val="accent1"/>
+                </a:solidFill>
+                <a:latin typeface="+mj-lt"/>
+                <a:ea typeface="+mj-ea"/>
+              </a:rPr>
+              <a:t>3,200원</a:t>
             </a:r>
           </a:p>
         </p:txBody>
@@ -1762,6 +4502,912 @@
 </file>
 
 <file path=ppt/slides/slide6.xml><?xml version="1.0" encoding="utf-8"?>
+<p:sld xmlns:a="http://schemas.openxmlformats.org/drawingml/2006/main" xmlns:r="http://schemas.openxmlformats.org/officeDocument/2006/relationships" xmlns:p="http://schemas.openxmlformats.org/presentationml/2006/main">
+  <p:cSld name="plan">
+    <p:spTree>
+      <p:nvGrpSpPr>
+        <p:cNvPr id="1" name=""/>
+        <p:cNvGrpSpPr/>
+        <p:nvPr/>
+      </p:nvGrpSpPr>
+      <p:grpSpPr>
+        <a:xfrm>
+          <a:off x="0" y="0"/>
+          <a:ext cx="0" cy="0"/>
+          <a:chOff x="0" y="0"/>
+          <a:chExt cx="0" cy="0"/>
+        </a:xfrm>
+      </p:grpSpPr>
+      <p:sp>
+        <p:nvSpPr>
+          <p:cNvPr id="2" name="h2 s5.0"/>
+          <p:cNvSpPr txBox="1"/>
+          <p:nvPr>
+            <p:ph type="title"/>
+          </p:nvPr>
+        </p:nvSpPr>
+        <p:spPr>
+          <a:xfrm>
+            <a:off x="609600" y="609600"/>
+            <a:ext cx="10972800" cy="445740"/>
+          </a:xfrm>
+          <a:prstGeom prst="rect">
+            <a:avLst/>
+          </a:prstGeom>
+          <a:noFill/>
+          <a:ln>
+            <a:noFill/>
+          </a:ln>
+        </p:spPr>
+        <p:txBody>
+          <a:bodyPr wrap="square" lIns="0" tIns="0" rIns="0" bIns="0" anchor="t">
+            <a:normAutofit/>
+          </a:bodyPr>
+          <a:lstStyle/>
+          <a:p>
+            <a:pPr algn="l">
+              <a:lnSpc>
+                <a:spcPts val="3510"/>
+              </a:lnSpc>
+            </a:pPr>
+            <a:r>
+              <a:rPr sz="2700" b="1">
+                <a:solidFill>
+                  <a:schemeClr val="tx1"/>
+                </a:solidFill>
+                <a:latin typeface="+mj-lt"/>
+                <a:ea typeface="+mj-ea"/>
+              </a:rPr>
+              <a:t>Q4 목표와 필요한 투자</a:t>
+            </a:r>
+          </a:p>
+        </p:txBody>
+      </p:sp>
+      <p:sp>
+        <p:nvSpPr>
+          <p:cNvPr id="3" name="shape s5.1.0"/>
+          <p:cNvSpPr/>
+          <p:nvPr/>
+        </p:nvSpPr>
+        <p:spPr>
+          <a:xfrm>
+            <a:off x="609600" y="1283940"/>
+            <a:ext cx="5372100" cy="4964460"/>
+          </a:xfrm>
+          <a:prstGeom prst="roundRect">
+            <a:avLst>
+              <a:gd name="adj" fmla="val 4605"/>
+            </a:avLst>
+          </a:prstGeom>
+          <a:solidFill>
+            <a:schemeClr val="bg2"/>
+          </a:solidFill>
+          <a:ln>
+            <a:noFill/>
+          </a:ln>
+        </p:spPr>
+        <p:txBody>
+          <a:bodyPr wrap="square" lIns="342900" tIns="342900" rIns="342900" bIns="342900" anchor="t">
+            <a:normAutofit/>
+          </a:bodyPr>
+          <a:lstStyle/>
+          <a:p/>
+        </p:txBody>
+      </p:sp>
+      <p:sp>
+        <p:nvSpPr>
+          <p:cNvPr id="4" name="text s5.1.0.0.0"/>
+          <p:cNvSpPr txBox="1"/>
+          <p:nvPr/>
+        </p:nvSpPr>
+        <p:spPr>
+          <a:xfrm>
+            <a:off x="1019324" y="1693664"/>
+            <a:ext cx="4552652" cy="257175"/>
+          </a:xfrm>
+          <a:prstGeom prst="rect">
+            <a:avLst/>
+          </a:prstGeom>
+          <a:noFill/>
+          <a:ln>
+            <a:noFill/>
+          </a:ln>
+        </p:spPr>
+        <p:txBody>
+          <a:bodyPr wrap="square" lIns="0" tIns="0" rIns="0" bIns="0" anchor="t">
+            <a:normAutofit/>
+          </a:bodyPr>
+          <a:lstStyle/>
+          <a:p>
+            <a:pPr algn="l">
+              <a:lnSpc>
+                <a:spcPts val="2025"/>
+              </a:lnSpc>
+            </a:pPr>
+            <a:r>
+              <a:rPr sz="1350" b="1">
+                <a:solidFill>
+                  <a:schemeClr val="accent1"/>
+                </a:solidFill>
+                <a:latin typeface="+mn-lt"/>
+                <a:ea typeface="+mn-ea"/>
+              </a:rPr>
+              <a:t>목표</a:t>
+            </a:r>
+          </a:p>
+        </p:txBody>
+      </p:sp>
+      <p:sp>
+        <p:nvSpPr>
+          <p:cNvPr id="5" name="text s5.1.0.0.1.0.0"/>
+          <p:cNvSpPr txBox="1"/>
+          <p:nvPr/>
+        </p:nvSpPr>
+        <p:spPr>
+          <a:xfrm>
+            <a:off x="1019324" y="2606873"/>
+            <a:ext cx="1504504" cy="342900"/>
+          </a:xfrm>
+          <a:prstGeom prst="rect">
+            <a:avLst/>
+          </a:prstGeom>
+          <a:noFill/>
+          <a:ln>
+            <a:noFill/>
+          </a:ln>
+        </p:spPr>
+        <p:txBody>
+          <a:bodyPr wrap="square" lIns="0" tIns="0" rIns="0" bIns="0" anchor="t">
+            <a:normAutofit/>
+          </a:bodyPr>
+          <a:lstStyle/>
+          <a:p>
+            <a:pPr algn="l">
+              <a:lnSpc>
+                <a:spcPts val="2700"/>
+              </a:lnSpc>
+            </a:pPr>
+            <a:r>
+              <a:rPr sz="1800" b="0">
+                <a:solidFill>
+                  <a:schemeClr val="tx1"/>
+                </a:solidFill>
+                <a:latin typeface="+mn-lt"/>
+                <a:ea typeface="+mn-ea"/>
+              </a:rPr>
+              <a:t>월간 활성 사용자</a:t>
+            </a:r>
+          </a:p>
+        </p:txBody>
+      </p:sp>
+      <p:sp>
+        <p:nvSpPr>
+          <p:cNvPr id="6" name="text s5.1.0.0.1.0.1"/>
+          <p:cNvSpPr txBox="1"/>
+          <p:nvPr/>
+        </p:nvSpPr>
+        <p:spPr>
+          <a:xfrm>
+            <a:off x="1019324" y="3006923"/>
+            <a:ext cx="1504504" cy="239911"/>
+          </a:xfrm>
+          <a:prstGeom prst="rect">
+            <a:avLst/>
+          </a:prstGeom>
+          <a:noFill/>
+          <a:ln>
+            <a:noFill/>
+          </a:ln>
+        </p:spPr>
+        <p:txBody>
+          <a:bodyPr wrap="square" lIns="0" tIns="0" rIns="0" bIns="0" anchor="t">
+            <a:normAutofit/>
+          </a:bodyPr>
+          <a:lstStyle/>
+          <a:p>
+            <a:pPr algn="l">
+              <a:lnSpc>
+                <a:spcPts val="1890"/>
+              </a:lnSpc>
+            </a:pPr>
+            <a:r>
+              <a:rPr sz="1350" b="0">
+                <a:solidFill>
+                  <a:schemeClr val="tx2"/>
+                </a:solidFill>
+                <a:latin typeface="+mn-lt"/>
+                <a:ea typeface="+mn-ea"/>
+              </a:rPr>
+              <a:t>Q3 2.9M</a:t>
+            </a:r>
+          </a:p>
+        </p:txBody>
+      </p:sp>
+      <p:sp>
+        <p:nvSpPr>
+          <p:cNvPr id="7" name="text s5.1.0.0.1.1"/>
+          <p:cNvSpPr txBox="1"/>
+          <p:nvPr/>
+        </p:nvSpPr>
+        <p:spPr>
+          <a:xfrm>
+            <a:off x="4558308" y="2652564"/>
+            <a:ext cx="1013668" cy="548580"/>
+          </a:xfrm>
+          <a:prstGeom prst="rect">
+            <a:avLst/>
+          </a:prstGeom>
+          <a:noFill/>
+          <a:ln>
+            <a:noFill/>
+          </a:ln>
+        </p:spPr>
+        <p:txBody>
+          <a:bodyPr wrap="square" lIns="0" tIns="0" rIns="0" bIns="0" anchor="t">
+            <a:normAutofit/>
+          </a:bodyPr>
+          <a:lstStyle/>
+          <a:p>
+            <a:pPr algn="l">
+              <a:lnSpc>
+                <a:spcPts val="4320"/>
+              </a:lnSpc>
+            </a:pPr>
+            <a:r>
+              <a:rPr sz="3600" b="1">
+                <a:solidFill>
+                  <a:schemeClr val="accent1"/>
+                </a:solidFill>
+                <a:latin typeface="+mj-lt"/>
+                <a:ea typeface="+mj-ea"/>
+              </a:rPr>
+              <a:t>3.4M</a:t>
+            </a:r>
+          </a:p>
+        </p:txBody>
+      </p:sp>
+      <p:sp>
+        <p:nvSpPr>
+          <p:cNvPr id="8" name="text s5.1.0.0.2.0.0"/>
+          <p:cNvSpPr txBox="1"/>
+          <p:nvPr/>
+        </p:nvSpPr>
+        <p:spPr>
+          <a:xfrm>
+            <a:off x="1019324" y="3902720"/>
+            <a:ext cx="851148" cy="342900"/>
+          </a:xfrm>
+          <a:prstGeom prst="rect">
+            <a:avLst/>
+          </a:prstGeom>
+          <a:noFill/>
+          <a:ln>
+            <a:noFill/>
+          </a:ln>
+        </p:spPr>
+        <p:txBody>
+          <a:bodyPr wrap="square" lIns="0" tIns="0" rIns="0" bIns="0" anchor="t">
+            <a:normAutofit/>
+          </a:bodyPr>
+          <a:lstStyle/>
+          <a:p>
+            <a:pPr algn="l">
+              <a:lnSpc>
+                <a:spcPts val="2700"/>
+              </a:lnSpc>
+            </a:pPr>
+            <a:r>
+              <a:rPr sz="1800" b="0">
+                <a:solidFill>
+                  <a:schemeClr val="tx1"/>
+                </a:solidFill>
+                <a:latin typeface="+mn-lt"/>
+                <a:ea typeface="+mn-ea"/>
+              </a:rPr>
+              <a:t>분기 매출</a:t>
+            </a:r>
+          </a:p>
+        </p:txBody>
+      </p:sp>
+      <p:sp>
+        <p:nvSpPr>
+          <p:cNvPr id="9" name="text s5.1.0.0.2.0.1"/>
+          <p:cNvSpPr txBox="1"/>
+          <p:nvPr/>
+        </p:nvSpPr>
+        <p:spPr>
+          <a:xfrm>
+            <a:off x="1019324" y="4302770"/>
+            <a:ext cx="851148" cy="239911"/>
+          </a:xfrm>
+          <a:prstGeom prst="rect">
+            <a:avLst/>
+          </a:prstGeom>
+          <a:noFill/>
+          <a:ln>
+            <a:noFill/>
+          </a:ln>
+        </p:spPr>
+        <p:txBody>
+          <a:bodyPr wrap="square" lIns="0" tIns="0" rIns="0" bIns="0" anchor="t">
+            <a:normAutofit/>
+          </a:bodyPr>
+          <a:lstStyle/>
+          <a:p>
+            <a:pPr algn="l">
+              <a:lnSpc>
+                <a:spcPts val="1890"/>
+              </a:lnSpc>
+            </a:pPr>
+            <a:r>
+              <a:rPr sz="1350" b="0">
+                <a:solidFill>
+                  <a:schemeClr val="tx2"/>
+                </a:solidFill>
+                <a:latin typeface="+mn-lt"/>
+                <a:ea typeface="+mn-ea"/>
+              </a:rPr>
+              <a:t>Q3 1.2B원</a:t>
+            </a:r>
+          </a:p>
+        </p:txBody>
+      </p:sp>
+      <p:sp>
+        <p:nvSpPr>
+          <p:cNvPr id="10" name="text s5.1.0.0.2.1"/>
+          <p:cNvSpPr txBox="1"/>
+          <p:nvPr/>
+        </p:nvSpPr>
+        <p:spPr>
+          <a:xfrm>
+            <a:off x="4733330" y="3948410"/>
+            <a:ext cx="838646" cy="548580"/>
+          </a:xfrm>
+          <a:prstGeom prst="rect">
+            <a:avLst/>
+          </a:prstGeom>
+          <a:noFill/>
+          <a:ln>
+            <a:noFill/>
+          </a:ln>
+        </p:spPr>
+        <p:txBody>
+          <a:bodyPr wrap="square" lIns="0" tIns="0" rIns="0" bIns="0" anchor="t">
+            <a:normAutofit/>
+          </a:bodyPr>
+          <a:lstStyle/>
+          <a:p>
+            <a:pPr algn="l">
+              <a:lnSpc>
+                <a:spcPts val="4320"/>
+              </a:lnSpc>
+            </a:pPr>
+            <a:r>
+              <a:rPr sz="3600" b="1">
+                <a:solidFill>
+                  <a:schemeClr val="accent1"/>
+                </a:solidFill>
+                <a:latin typeface="+mj-lt"/>
+                <a:ea typeface="+mj-ea"/>
+              </a:rPr>
+              <a:t>1.4B</a:t>
+            </a:r>
+          </a:p>
+        </p:txBody>
+      </p:sp>
+      <p:sp>
+        <p:nvSpPr>
+          <p:cNvPr id="11" name="text s5.1.0.0.3.0.0"/>
+          <p:cNvSpPr txBox="1"/>
+          <p:nvPr/>
+        </p:nvSpPr>
+        <p:spPr>
+          <a:xfrm>
+            <a:off x="1019324" y="5198715"/>
+            <a:ext cx="849809" cy="342900"/>
+          </a:xfrm>
+          <a:prstGeom prst="rect">
+            <a:avLst/>
+          </a:prstGeom>
+          <a:noFill/>
+          <a:ln>
+            <a:noFill/>
+          </a:ln>
+        </p:spPr>
+        <p:txBody>
+          <a:bodyPr wrap="square" lIns="0" tIns="0" rIns="0" bIns="0" anchor="t">
+            <a:normAutofit/>
+          </a:bodyPr>
+          <a:lstStyle/>
+          <a:p>
+            <a:pPr algn="l">
+              <a:lnSpc>
+                <a:spcPts val="2700"/>
+              </a:lnSpc>
+            </a:pPr>
+            <a:r>
+              <a:rPr sz="1800" b="0">
+                <a:solidFill>
+                  <a:schemeClr val="tx1"/>
+                </a:solidFill>
+                <a:latin typeface="+mn-lt"/>
+                <a:ea typeface="+mn-ea"/>
+              </a:rPr>
+              <a:t>평균 CAC</a:t>
+            </a:r>
+          </a:p>
+        </p:txBody>
+      </p:sp>
+      <p:sp>
+        <p:nvSpPr>
+          <p:cNvPr id="12" name="text s5.1.0.0.3.0.1"/>
+          <p:cNvSpPr txBox="1"/>
+          <p:nvPr/>
+        </p:nvSpPr>
+        <p:spPr>
+          <a:xfrm>
+            <a:off x="1019324" y="5598765"/>
+            <a:ext cx="849809" cy="239911"/>
+          </a:xfrm>
+          <a:prstGeom prst="rect">
+            <a:avLst/>
+          </a:prstGeom>
+          <a:noFill/>
+          <a:ln>
+            <a:noFill/>
+          </a:ln>
+        </p:spPr>
+        <p:txBody>
+          <a:bodyPr wrap="square" lIns="0" tIns="0" rIns="0" bIns="0" anchor="t">
+            <a:normAutofit/>
+          </a:bodyPr>
+          <a:lstStyle/>
+          <a:p>
+            <a:pPr algn="l">
+              <a:lnSpc>
+                <a:spcPts val="1890"/>
+              </a:lnSpc>
+            </a:pPr>
+            <a:r>
+              <a:rPr sz="1350" b="0">
+                <a:solidFill>
+                  <a:schemeClr val="tx2"/>
+                </a:solidFill>
+                <a:latin typeface="+mn-lt"/>
+                <a:ea typeface="+mn-ea"/>
+              </a:rPr>
+              <a:t>Q3 8,900원</a:t>
+            </a:r>
+          </a:p>
+        </p:txBody>
+      </p:sp>
+      <p:sp>
+        <p:nvSpPr>
+          <p:cNvPr id="13" name="text s5.1.0.0.3.1"/>
+          <p:cNvSpPr txBox="1"/>
+          <p:nvPr/>
+        </p:nvSpPr>
+        <p:spPr>
+          <a:xfrm>
+            <a:off x="4400550" y="5244405"/>
+            <a:ext cx="1171426" cy="548580"/>
+          </a:xfrm>
+          <a:prstGeom prst="rect">
+            <a:avLst/>
+          </a:prstGeom>
+          <a:noFill/>
+          <a:ln>
+            <a:noFill/>
+          </a:ln>
+        </p:spPr>
+        <p:txBody>
+          <a:bodyPr wrap="square" lIns="0" tIns="0" rIns="0" bIns="0" anchor="t">
+            <a:normAutofit/>
+          </a:bodyPr>
+          <a:lstStyle/>
+          <a:p>
+            <a:pPr algn="l">
+              <a:lnSpc>
+                <a:spcPts val="4320"/>
+              </a:lnSpc>
+            </a:pPr>
+            <a:r>
+              <a:rPr sz="3600" b="1">
+                <a:solidFill>
+                  <a:schemeClr val="accent1"/>
+                </a:solidFill>
+                <a:latin typeface="+mj-lt"/>
+                <a:ea typeface="+mj-ea"/>
+              </a:rPr>
+              <a:t>7,000</a:t>
+            </a:r>
+          </a:p>
+        </p:txBody>
+      </p:sp>
+      <p:sp>
+        <p:nvSpPr>
+          <p:cNvPr id="14" name="shape s5.2.0"/>
+          <p:cNvSpPr/>
+          <p:nvPr/>
+        </p:nvSpPr>
+        <p:spPr>
+          <a:xfrm>
+            <a:off x="6210300" y="1283940"/>
+            <a:ext cx="5372100" cy="4964460"/>
+          </a:xfrm>
+          <a:prstGeom prst="roundRect">
+            <a:avLst>
+              <a:gd name="adj" fmla="val 4605"/>
+            </a:avLst>
+          </a:prstGeom>
+          <a:solidFill>
+            <a:schemeClr val="bg2"/>
+          </a:solidFill>
+          <a:ln>
+            <a:noFill/>
+          </a:ln>
+        </p:spPr>
+        <p:txBody>
+          <a:bodyPr wrap="square" lIns="342900" tIns="342900" rIns="342900" bIns="342900" anchor="t">
+            <a:normAutofit/>
+          </a:bodyPr>
+          <a:lstStyle/>
+          <a:p/>
+        </p:txBody>
+      </p:sp>
+      <p:sp>
+        <p:nvSpPr>
+          <p:cNvPr id="15" name="text s5.2.0.0.0"/>
+          <p:cNvSpPr txBox="1"/>
+          <p:nvPr/>
+        </p:nvSpPr>
+        <p:spPr>
+          <a:xfrm>
+            <a:off x="6620024" y="1693664"/>
+            <a:ext cx="4552652" cy="257175"/>
+          </a:xfrm>
+          <a:prstGeom prst="rect">
+            <a:avLst/>
+          </a:prstGeom>
+          <a:noFill/>
+          <a:ln>
+            <a:noFill/>
+          </a:ln>
+        </p:spPr>
+        <p:txBody>
+          <a:bodyPr wrap="square" lIns="0" tIns="0" rIns="0" bIns="0" anchor="t">
+            <a:normAutofit/>
+          </a:bodyPr>
+          <a:lstStyle/>
+          <a:p>
+            <a:pPr algn="l">
+              <a:lnSpc>
+                <a:spcPts val="2025"/>
+              </a:lnSpc>
+            </a:pPr>
+            <a:r>
+              <a:rPr sz="1350" b="1">
+                <a:solidFill>
+                  <a:schemeClr val="accent1"/>
+                </a:solidFill>
+                <a:latin typeface="+mn-lt"/>
+                <a:ea typeface="+mn-ea"/>
+              </a:rPr>
+              <a:t>투자</a:t>
+            </a:r>
+          </a:p>
+        </p:txBody>
+      </p:sp>
+      <p:sp>
+        <p:nvSpPr>
+          <p:cNvPr id="16" name="text s5.2.0.0.1.0"/>
+          <p:cNvSpPr txBox="1"/>
+          <p:nvPr/>
+        </p:nvSpPr>
+        <p:spPr>
+          <a:xfrm>
+            <a:off x="6620024" y="2354312"/>
+            <a:ext cx="4552652" cy="346621"/>
+          </a:xfrm>
+          <a:prstGeom prst="rect">
+            <a:avLst/>
+          </a:prstGeom>
+          <a:noFill/>
+          <a:ln>
+            <a:noFill/>
+          </a:ln>
+        </p:spPr>
+        <p:txBody>
+          <a:bodyPr wrap="square" lIns="0" tIns="0" rIns="0" bIns="0" anchor="t">
+            <a:normAutofit/>
+          </a:bodyPr>
+          <a:lstStyle/>
+          <a:p>
+            <a:pPr algn="l">
+              <a:lnSpc>
+                <a:spcPts val="2730"/>
+              </a:lnSpc>
+            </a:pPr>
+            <a:r>
+              <a:rPr sz="2100" b="1">
+                <a:solidFill>
+                  <a:schemeClr val="tx1"/>
+                </a:solidFill>
+                <a:latin typeface="+mj-lt"/>
+                <a:ea typeface="+mj-ea"/>
+              </a:rPr>
+              <a:t>추천 보상 예산 2배</a:t>
+            </a:r>
+          </a:p>
+        </p:txBody>
+      </p:sp>
+      <p:sp>
+        <p:nvSpPr>
+          <p:cNvPr id="17" name="text s5.2.0.0.1.1"/>
+          <p:cNvSpPr txBox="1"/>
+          <p:nvPr/>
+        </p:nvSpPr>
+        <p:spPr>
+          <a:xfrm>
+            <a:off x="6620024" y="2758083"/>
+            <a:ext cx="4552652" cy="239911"/>
+          </a:xfrm>
+          <a:prstGeom prst="rect">
+            <a:avLst/>
+          </a:prstGeom>
+          <a:noFill/>
+          <a:ln>
+            <a:noFill/>
+          </a:ln>
+        </p:spPr>
+        <p:txBody>
+          <a:bodyPr wrap="square" lIns="0" tIns="0" rIns="0" bIns="0" anchor="t">
+            <a:normAutofit/>
+          </a:bodyPr>
+          <a:lstStyle/>
+          <a:p>
+            <a:pPr algn="l">
+              <a:lnSpc>
+                <a:spcPts val="1890"/>
+              </a:lnSpc>
+            </a:pPr>
+            <a:r>
+              <a:rPr sz="1350" b="0">
+                <a:solidFill>
+                  <a:schemeClr val="tx2"/>
+                </a:solidFill>
+                <a:latin typeface="+mn-lt"/>
+                <a:ea typeface="+mn-ea"/>
+              </a:rPr>
+              <a:t>디스플레이 광고 예산에서 옮긴다</a:t>
+            </a:r>
+          </a:p>
+        </p:txBody>
+      </p:sp>
+      <p:sp>
+        <p:nvSpPr>
+          <p:cNvPr id="18" name="text s5.2.0.0.2.0"/>
+          <p:cNvSpPr txBox="1"/>
+          <p:nvPr/>
+        </p:nvSpPr>
+        <p:spPr>
+          <a:xfrm>
+            <a:off x="6620024" y="3401467"/>
+            <a:ext cx="4552652" cy="346621"/>
+          </a:xfrm>
+          <a:prstGeom prst="rect">
+            <a:avLst/>
+          </a:prstGeom>
+          <a:noFill/>
+          <a:ln>
+            <a:noFill/>
+          </a:ln>
+        </p:spPr>
+        <p:txBody>
+          <a:bodyPr wrap="square" lIns="0" tIns="0" rIns="0" bIns="0" anchor="t">
+            <a:normAutofit/>
+          </a:bodyPr>
+          <a:lstStyle/>
+          <a:p>
+            <a:pPr algn="l">
+              <a:lnSpc>
+                <a:spcPts val="2730"/>
+              </a:lnSpc>
+            </a:pPr>
+            <a:r>
+              <a:rPr sz="2100" b="1">
+                <a:solidFill>
+                  <a:schemeClr val="tx1"/>
+                </a:solidFill>
+                <a:latin typeface="+mj-lt"/>
+                <a:ea typeface="+mj-ea"/>
+              </a:rPr>
+              <a:t>온보딩 개선 · 엔지니어 2명</a:t>
+            </a:r>
+          </a:p>
+        </p:txBody>
+      </p:sp>
+      <p:sp>
+        <p:nvSpPr>
+          <p:cNvPr id="19" name="text s5.2.0.0.2.1"/>
+          <p:cNvSpPr txBox="1"/>
+          <p:nvPr/>
+        </p:nvSpPr>
+        <p:spPr>
+          <a:xfrm>
+            <a:off x="6620024" y="3805238"/>
+            <a:ext cx="4552652" cy="239911"/>
+          </a:xfrm>
+          <a:prstGeom prst="rect">
+            <a:avLst/>
+          </a:prstGeom>
+          <a:noFill/>
+          <a:ln>
+            <a:noFill/>
+          </a:ln>
+        </p:spPr>
+        <p:txBody>
+          <a:bodyPr wrap="square" lIns="0" tIns="0" rIns="0" bIns="0" anchor="t">
+            <a:normAutofit/>
+          </a:bodyPr>
+          <a:lstStyle/>
+          <a:p>
+            <a:pPr algn="l">
+              <a:lnSpc>
+                <a:spcPts val="1890"/>
+              </a:lnSpc>
+            </a:pPr>
+            <a:r>
+              <a:rPr sz="1350" b="0">
+                <a:solidFill>
+                  <a:schemeClr val="tx2"/>
+                </a:solidFill>
+                <a:latin typeface="+mn-lt"/>
+                <a:ea typeface="+mn-ea"/>
+              </a:rPr>
+              <a:t>첫 주 이탈률 31% → 24%</a:t>
+            </a:r>
+          </a:p>
+        </p:txBody>
+      </p:sp>
+      <p:sp>
+        <p:nvSpPr>
+          <p:cNvPr id="20" name="text s5.2.0.0.3.0"/>
+          <p:cNvSpPr txBox="1"/>
+          <p:nvPr/>
+        </p:nvSpPr>
+        <p:spPr>
+          <a:xfrm>
+            <a:off x="6620024" y="4448621"/>
+            <a:ext cx="4552652" cy="346621"/>
+          </a:xfrm>
+          <a:prstGeom prst="rect">
+            <a:avLst/>
+          </a:prstGeom>
+          <a:noFill/>
+          <a:ln>
+            <a:noFill/>
+          </a:ln>
+        </p:spPr>
+        <p:txBody>
+          <a:bodyPr wrap="square" lIns="0" tIns="0" rIns="0" bIns="0" anchor="t">
+            <a:normAutofit/>
+          </a:bodyPr>
+          <a:lstStyle/>
+          <a:p>
+            <a:pPr algn="l">
+              <a:lnSpc>
+                <a:spcPts val="2730"/>
+              </a:lnSpc>
+            </a:pPr>
+            <a:r>
+              <a:rPr sz="2100" b="1">
+                <a:solidFill>
+                  <a:schemeClr val="tx1"/>
+                </a:solidFill>
+                <a:latin typeface="+mj-lt"/>
+                <a:ea typeface="+mj-ea"/>
+              </a:rPr>
+              <a:t>추천 어트리뷰션 정비</a:t>
+            </a:r>
+          </a:p>
+        </p:txBody>
+      </p:sp>
+      <p:sp>
+        <p:nvSpPr>
+          <p:cNvPr id="21" name="text s5.2.0.0.3.1"/>
+          <p:cNvSpPr txBox="1"/>
+          <p:nvPr/>
+        </p:nvSpPr>
+        <p:spPr>
+          <a:xfrm>
+            <a:off x="6620024" y="4852392"/>
+            <a:ext cx="4552652" cy="239911"/>
+          </a:xfrm>
+          <a:prstGeom prst="rect">
+            <a:avLst/>
+          </a:prstGeom>
+          <a:noFill/>
+          <a:ln>
+            <a:noFill/>
+          </a:ln>
+        </p:spPr>
+        <p:txBody>
+          <a:bodyPr wrap="square" lIns="0" tIns="0" rIns="0" bIns="0" anchor="t">
+            <a:normAutofit/>
+          </a:bodyPr>
+          <a:lstStyle/>
+          <a:p>
+            <a:pPr algn="l">
+              <a:lnSpc>
+                <a:spcPts val="1890"/>
+              </a:lnSpc>
+            </a:pPr>
+            <a:r>
+              <a:rPr sz="1350" b="0">
+                <a:solidFill>
+                  <a:schemeClr val="tx2"/>
+                </a:solidFill>
+                <a:latin typeface="+mn-lt"/>
+                <a:ea typeface="+mn-ea"/>
+              </a:rPr>
+              <a:t>링크 경유 가입의 18%가 미집계</a:t>
+            </a:r>
+          </a:p>
+        </p:txBody>
+      </p:sp>
+      <p:sp>
+        <p:nvSpPr>
+          <p:cNvPr id="22" name="text s5.2.0.0.4"/>
+          <p:cNvSpPr txBox="1"/>
+          <p:nvPr/>
+        </p:nvSpPr>
+        <p:spPr>
+          <a:xfrm>
+            <a:off x="6620024" y="5495776"/>
+            <a:ext cx="4552652" cy="342900"/>
+          </a:xfrm>
+          <a:prstGeom prst="rect">
+            <a:avLst/>
+          </a:prstGeom>
+          <a:noFill/>
+          <a:ln>
+            <a:noFill/>
+          </a:ln>
+        </p:spPr>
+        <p:txBody>
+          <a:bodyPr wrap="square" lIns="0" tIns="0" rIns="0" bIns="0" anchor="t">
+            <a:normAutofit/>
+          </a:bodyPr>
+          <a:lstStyle/>
+          <a:p>
+            <a:pPr algn="l">
+              <a:lnSpc>
+                <a:spcPts val="2700"/>
+              </a:lnSpc>
+            </a:pPr>
+            <a:r>
+              <a:rPr sz="1800" b="1" i="0" u="none">
+                <a:solidFill>
+                  <a:schemeClr val="accent1"/>
+                </a:solidFill>
+                <a:latin typeface="+mn-lt"/>
+                <a:ea typeface="+mn-ea"/>
+              </a:rPr>
+              <a:t>추가 예산 0원 — 재배치만 한다</a:t>
+            </a:r>
+          </a:p>
+        </p:txBody>
+      </p:sp>
+    </p:spTree>
+  </p:cSld>
+  <p:clrMapOvr>
+    <a:masterClrMapping/>
+  </p:clrMapOvr>
+</p:sld>
+</file>
+
+<file path=ppt/slides/slide7.xml><?xml version="1.0" encoding="utf-8"?>
 <p:sld xmlns:a="http://schemas.openxmlformats.org/drawingml/2006/main" xmlns:r="http://schemas.openxmlformats.org/officeDocument/2006/relationships" xmlns:p="http://schemas.openxmlformats.org/presentationml/2006/main">
   <p:cSld name="end">
     <p:spTree>
@@ -1780,14 +5426,14 @@
       </p:grpSpPr>
       <p:sp>
         <p:nvSpPr>
-          <p:cNvPr id="2" name="text s5.0"/>
-          <p:cNvSpPr txBox="1"/>
-          <p:nvPr/>
-        </p:nvSpPr>
-        <p:spPr>
-          <a:xfrm>
-            <a:off x="609600" y="2823270"/>
-            <a:ext cx="10972800" cy="639961"/>
+          <p:cNvPr id="2" name="text s6.0"/>
+          <p:cNvSpPr txBox="1"/>
+          <p:nvPr/>
+        </p:nvSpPr>
+        <p:spPr>
+          <a:xfrm>
+            <a:off x="609600" y="2729954"/>
+            <a:ext cx="10972800" cy="822871"/>
           </a:xfrm>
           <a:prstGeom prst="rect">
             <a:avLst/>
@@ -1805,11 +5451,11 @@
           <a:p>
             <a:pPr algn="ctr">
               <a:lnSpc>
-                <a:spcPts val="5040"/>
-              </a:lnSpc>
-            </a:pPr>
-            <a:r>
-              <a:rPr sz="4200" b="1">
+                <a:spcPts val="6480"/>
+              </a:lnSpc>
+            </a:pPr>
+            <a:r>
+              <a:rPr sz="5400" b="1">
                 <a:solidFill>
                   <a:schemeClr val="tx1"/>
                 </a:solidFill>
@@ -1823,14 +5469,14 @@
       </p:sp>
       <p:sp>
         <p:nvSpPr>
-          <p:cNvPr id="3" name="text s5.1"/>
-          <p:cNvSpPr txBox="1"/>
-          <p:nvPr/>
-        </p:nvSpPr>
-        <p:spPr>
-          <a:xfrm>
-            <a:off x="609600" y="3691830"/>
-            <a:ext cx="10972800" cy="342900"/>
+          <p:cNvPr id="3" name="text s6.1"/>
+          <p:cNvSpPr txBox="1"/>
+          <p:nvPr/>
+        </p:nvSpPr>
+        <p:spPr>
+          <a:xfrm>
+            <a:off x="609600" y="3781425"/>
+            <a:ext cx="10972800" cy="346621"/>
           </a:xfrm>
           <a:prstGeom prst="rect">
             <a:avLst/>
@@ -1848,16 +5494,16 @@
           <a:p>
             <a:pPr algn="ctr">
               <a:lnSpc>
-                <a:spcPts val="2700"/>
-              </a:lnSpc>
-            </a:pPr>
-            <a:r>
-              <a:rPr sz="1800" b="0">
+                <a:spcPts val="2730"/>
+              </a:lnSpc>
+            </a:pPr>
+            <a:r>
+              <a:rPr sz="2100" b="1">
                 <a:solidFill>
                   <a:schemeClr val="tx2"/>
                 </a:solidFill>
-                <a:latin typeface="+mn-lt"/>
-                <a:ea typeface="+mn-ea"/>
+                <a:latin typeface="+mj-lt"/>
+                <a:ea typeface="+mj-ea"/>
               </a:rPr>
               <a:t>질문은 #growth 채널로</a:t>
             </a:r>

--- a/examples/showcase/decks/quarterly-review/q3-비즈니스-리뷰.pptx
+++ b/examples/showcase/decks/quarterly-review/q3-비즈니스-리뷰.pptx
@@ -2285,10 +2285,10 @@
                 <a:tableStyleId>{5940675A-B579-460E-94D1-54222C63F5DA}</a:tableStyleId>
               </a:tblPr>
               <a:tblGrid>
-                <a:gridCol w="2453134"/>
-                <a:gridCol w="1872853"/>
-                <a:gridCol w="1209675"/>
-                <a:gridCol w="1550938"/>
+                <a:gridCol w="2462808"/>
+                <a:gridCol w="1873746"/>
+                <a:gridCol w="1207145"/>
+                <a:gridCol w="1542901"/>
               </a:tblGrid>
               <a:tr h="645616">
                 <a:tc>
@@ -3823,7 +3823,7 @@
         <p:spPr>
           <a:xfrm>
             <a:off x="8448824" y="2179439"/>
-            <a:ext cx="2723852" cy="1571625"/>
+            <a:ext cx="2723852" cy="1885950"/>
           </a:xfrm>
           <a:prstGeom prst="rect">
             <a:avLst/>
@@ -4131,19 +4131,19 @@
         </p:nvSpPr>
         <p:spPr>
           <a:xfrm>
-            <a:off x="3103364" y="2589758"/>
-            <a:ext cx="5985272" cy="594271"/>
-          </a:xfrm>
-          <a:prstGeom prst="rect">
-            <a:avLst/>
-          </a:prstGeom>
-          <a:noFill/>
-          <a:ln>
-            <a:noFill/>
-          </a:ln>
-        </p:spPr>
-        <p:txBody>
-          <a:bodyPr wrap="square" lIns="0" tIns="0" rIns="0" bIns="0" anchor="t">
+            <a:off x="2936825" y="2589758"/>
+            <a:ext cx="6318200" cy="594271"/>
+          </a:xfrm>
+          <a:prstGeom prst="rect">
+            <a:avLst/>
+          </a:prstGeom>
+          <a:noFill/>
+          <a:ln>
+            <a:noFill/>
+          </a:ln>
+        </p:spPr>
+        <p:txBody>
+          <a:bodyPr wrap="none" lIns="0" tIns="0" rIns="0" bIns="0" anchor="t">
             <a:normAutofit/>
           </a:bodyPr>
           <a:lstStyle/>
@@ -4174,8 +4174,8 @@
         </p:nvSpPr>
         <p:spPr>
           <a:xfrm>
-            <a:off x="3103364" y="3298329"/>
-            <a:ext cx="5985272" cy="321915"/>
+            <a:off x="2936825" y="3298329"/>
+            <a:ext cx="6318200" cy="321915"/>
           </a:xfrm>
           <a:prstGeom prst="rect">
             <a:avLst/>
@@ -4299,18 +4299,18 @@
         <p:spPr>
           <a:xfrm>
             <a:off x="905024" y="5530007"/>
-            <a:ext cx="849809" cy="342900"/>
-          </a:xfrm>
-          <a:prstGeom prst="rect">
-            <a:avLst/>
-          </a:prstGeom>
-          <a:noFill/>
-          <a:ln>
-            <a:noFill/>
-          </a:ln>
-        </p:spPr>
-        <p:txBody>
-          <a:bodyPr wrap="square" lIns="0" tIns="0" rIns="0" bIns="0" anchor="t">
+            <a:ext cx="910530" cy="342900"/>
+          </a:xfrm>
+          <a:prstGeom prst="rect">
+            <a:avLst/>
+          </a:prstGeom>
+          <a:noFill/>
+          <a:ln>
+            <a:noFill/>
+          </a:ln>
+        </p:spPr>
+        <p:txBody>
+          <a:bodyPr wrap="none" lIns="0" tIns="0" rIns="0" bIns="0" anchor="t">
             <a:normAutofit/>
           </a:bodyPr>
           <a:lstStyle/>
@@ -4341,19 +4341,19 @@
         </p:nvSpPr>
         <p:spPr>
           <a:xfrm>
-            <a:off x="3983236" y="5450086"/>
-            <a:ext cx="1645890" cy="502890"/>
-          </a:xfrm>
-          <a:prstGeom prst="rect">
-            <a:avLst/>
-          </a:prstGeom>
-          <a:noFill/>
-          <a:ln>
-            <a:noFill/>
-          </a:ln>
-        </p:spPr>
-        <p:txBody>
-          <a:bodyPr wrap="square" lIns="0" tIns="0" rIns="0" bIns="0" anchor="t">
+            <a:off x="3925342" y="5450086"/>
+            <a:ext cx="1703784" cy="502890"/>
+          </a:xfrm>
+          <a:prstGeom prst="rect">
+            <a:avLst/>
+          </a:prstGeom>
+          <a:noFill/>
+          <a:ln>
+            <a:noFill/>
+          </a:ln>
+        </p:spPr>
+        <p:txBody>
+          <a:bodyPr wrap="none" lIns="0" tIns="0" rIns="0" bIns="0" anchor="t">
             <a:normAutofit/>
           </a:bodyPr>
           <a:lstStyle/>
@@ -4416,18 +4416,18 @@
         <p:spPr>
           <a:xfrm>
             <a:off x="6562874" y="5530007"/>
-            <a:ext cx="849809" cy="342900"/>
-          </a:xfrm>
-          <a:prstGeom prst="rect">
-            <a:avLst/>
-          </a:prstGeom>
-          <a:noFill/>
-          <a:ln>
-            <a:noFill/>
-          </a:ln>
-        </p:spPr>
-        <p:txBody>
-          <a:bodyPr wrap="square" lIns="0" tIns="0" rIns="0" bIns="0" anchor="t">
+            <a:ext cx="910530" cy="342900"/>
+          </a:xfrm>
+          <a:prstGeom prst="rect">
+            <a:avLst/>
+          </a:prstGeom>
+          <a:noFill/>
+          <a:ln>
+            <a:noFill/>
+          </a:ln>
+        </p:spPr>
+        <p:txBody>
+          <a:bodyPr wrap="none" lIns="0" tIns="0" rIns="0" bIns="0" anchor="t">
             <a:normAutofit/>
           </a:bodyPr>
           <a:lstStyle/>
@@ -4458,19 +4458,19 @@
         </p:nvSpPr>
         <p:spPr>
           <a:xfrm>
-            <a:off x="9837241" y="5450086"/>
-            <a:ext cx="1449735" cy="502890"/>
-          </a:xfrm>
-          <a:prstGeom prst="rect">
-            <a:avLst/>
-          </a:prstGeom>
-          <a:noFill/>
-          <a:ln>
-            <a:noFill/>
-          </a:ln>
-        </p:spPr>
-        <p:txBody>
-          <a:bodyPr wrap="square" lIns="0" tIns="0" rIns="0" bIns="0" anchor="t">
+            <a:off x="9822954" y="5450086"/>
+            <a:ext cx="1464022" cy="502890"/>
+          </a:xfrm>
+          <a:prstGeom prst="rect">
+            <a:avLst/>
+          </a:prstGeom>
+          <a:noFill/>
+          <a:ln>
+            <a:noFill/>
+          </a:ln>
+        </p:spPr>
+        <p:txBody>
+          <a:bodyPr wrap="none" lIns="0" tIns="0" rIns="0" bIns="0" anchor="t">
             <a:normAutofit/>
           </a:bodyPr>
           <a:lstStyle/>
@@ -4646,18 +4646,18 @@
         <p:spPr>
           <a:xfrm>
             <a:off x="1019324" y="2606873"/>
-            <a:ext cx="1504504" cy="342900"/>
-          </a:xfrm>
-          <a:prstGeom prst="rect">
-            <a:avLst/>
-          </a:prstGeom>
-          <a:noFill/>
-          <a:ln>
-            <a:noFill/>
-          </a:ln>
-        </p:spPr>
-        <p:txBody>
-          <a:bodyPr wrap="square" lIns="0" tIns="0" rIns="0" bIns="0" anchor="t">
+            <a:ext cx="1591121" cy="342900"/>
+          </a:xfrm>
+          <a:prstGeom prst="rect">
+            <a:avLst/>
+          </a:prstGeom>
+          <a:noFill/>
+          <a:ln>
+            <a:noFill/>
+          </a:ln>
+        </p:spPr>
+        <p:txBody>
+          <a:bodyPr wrap="none" lIns="0" tIns="0" rIns="0" bIns="0" anchor="t">
             <a:normAutofit/>
           </a:bodyPr>
           <a:lstStyle/>
@@ -4689,7 +4689,7 @@
         <p:spPr>
           <a:xfrm>
             <a:off x="1019324" y="3006923"/>
-            <a:ext cx="1504504" cy="239911"/>
+            <a:ext cx="1591121" cy="239911"/>
           </a:xfrm>
           <a:prstGeom prst="rect">
             <a:avLst/>
@@ -4731,19 +4731,19 @@
         </p:nvSpPr>
         <p:spPr>
           <a:xfrm>
-            <a:off x="4558308" y="2652564"/>
-            <a:ext cx="1013668" cy="548580"/>
-          </a:xfrm>
-          <a:prstGeom prst="rect">
-            <a:avLst/>
-          </a:prstGeom>
-          <a:noFill/>
-          <a:ln>
-            <a:noFill/>
-          </a:ln>
-        </p:spPr>
-        <p:txBody>
-          <a:bodyPr wrap="square" lIns="0" tIns="0" rIns="0" bIns="0" anchor="t">
+            <a:off x="4487466" y="2652564"/>
+            <a:ext cx="1084511" cy="548580"/>
+          </a:xfrm>
+          <a:prstGeom prst="rect">
+            <a:avLst/>
+          </a:prstGeom>
+          <a:noFill/>
+          <a:ln>
+            <a:noFill/>
+          </a:ln>
+        </p:spPr>
+        <p:txBody>
+          <a:bodyPr wrap="none" lIns="0" tIns="0" rIns="0" bIns="0" anchor="t">
             <a:normAutofit/>
           </a:bodyPr>
           <a:lstStyle/>
@@ -4775,18 +4775,18 @@
         <p:spPr>
           <a:xfrm>
             <a:off x="1019324" y="3902720"/>
-            <a:ext cx="851148" cy="342900"/>
-          </a:xfrm>
-          <a:prstGeom prst="rect">
-            <a:avLst/>
-          </a:prstGeom>
-          <a:noFill/>
-          <a:ln>
-            <a:noFill/>
-          </a:ln>
-        </p:spPr>
-        <p:txBody>
-          <a:bodyPr wrap="square" lIns="0" tIns="0" rIns="0" bIns="0" anchor="t">
+            <a:ext cx="900708" cy="342900"/>
+          </a:xfrm>
+          <a:prstGeom prst="rect">
+            <a:avLst/>
+          </a:prstGeom>
+          <a:noFill/>
+          <a:ln>
+            <a:noFill/>
+          </a:ln>
+        </p:spPr>
+        <p:txBody>
+          <a:bodyPr wrap="none" lIns="0" tIns="0" rIns="0" bIns="0" anchor="t">
             <a:normAutofit/>
           </a:bodyPr>
           <a:lstStyle/>
@@ -4818,7 +4818,7 @@
         <p:spPr>
           <a:xfrm>
             <a:off x="1019324" y="4302770"/>
-            <a:ext cx="851148" cy="239911"/>
+            <a:ext cx="900708" cy="239911"/>
           </a:xfrm>
           <a:prstGeom prst="rect">
             <a:avLst/>
@@ -4860,19 +4860,19 @@
         </p:nvSpPr>
         <p:spPr>
           <a:xfrm>
-            <a:off x="4733330" y="3948410"/>
-            <a:ext cx="838646" cy="548580"/>
-          </a:xfrm>
-          <a:prstGeom prst="rect">
-            <a:avLst/>
-          </a:prstGeom>
-          <a:noFill/>
-          <a:ln>
-            <a:noFill/>
-          </a:ln>
-        </p:spPr>
-        <p:txBody>
-          <a:bodyPr wrap="square" lIns="0" tIns="0" rIns="0" bIns="0" anchor="t">
+            <a:off x="4611291" y="3948410"/>
+            <a:ext cx="960686" cy="548580"/>
+          </a:xfrm>
+          <a:prstGeom prst="rect">
+            <a:avLst/>
+          </a:prstGeom>
+          <a:noFill/>
+          <a:ln>
+            <a:noFill/>
+          </a:ln>
+        </p:spPr>
+        <p:txBody>
+          <a:bodyPr wrap="none" lIns="0" tIns="0" rIns="0" bIns="0" anchor="t">
             <a:normAutofit/>
           </a:bodyPr>
           <a:lstStyle/>
@@ -4904,18 +4904,18 @@
         <p:spPr>
           <a:xfrm>
             <a:off x="1019324" y="5198715"/>
-            <a:ext cx="849809" cy="342900"/>
-          </a:xfrm>
-          <a:prstGeom prst="rect">
-            <a:avLst/>
-          </a:prstGeom>
-          <a:noFill/>
-          <a:ln>
-            <a:noFill/>
-          </a:ln>
-        </p:spPr>
-        <p:txBody>
-          <a:bodyPr wrap="square" lIns="0" tIns="0" rIns="0" bIns="0" anchor="t">
+            <a:ext cx="910530" cy="342900"/>
+          </a:xfrm>
+          <a:prstGeom prst="rect">
+            <a:avLst/>
+          </a:prstGeom>
+          <a:noFill/>
+          <a:ln>
+            <a:noFill/>
+          </a:ln>
+        </p:spPr>
+        <p:txBody>
+          <a:bodyPr wrap="none" lIns="0" tIns="0" rIns="0" bIns="0" anchor="t">
             <a:normAutofit/>
           </a:bodyPr>
           <a:lstStyle/>
@@ -4947,7 +4947,7 @@
         <p:spPr>
           <a:xfrm>
             <a:off x="1019324" y="5598765"/>
-            <a:ext cx="849809" cy="239911"/>
+            <a:ext cx="910530" cy="239911"/>
           </a:xfrm>
           <a:prstGeom prst="rect">
             <a:avLst/>
@@ -4989,19 +4989,19 @@
         </p:nvSpPr>
         <p:spPr>
           <a:xfrm>
-            <a:off x="4400550" y="5244405"/>
-            <a:ext cx="1171426" cy="548580"/>
-          </a:xfrm>
-          <a:prstGeom prst="rect">
-            <a:avLst/>
-          </a:prstGeom>
-          <a:noFill/>
-          <a:ln>
-            <a:noFill/>
-          </a:ln>
-        </p:spPr>
-        <p:txBody>
-          <a:bodyPr wrap="square" lIns="0" tIns="0" rIns="0" bIns="0" anchor="t">
+            <a:off x="4395490" y="5244405"/>
+            <a:ext cx="1176486" cy="548580"/>
+          </a:xfrm>
+          <a:prstGeom prst="rect">
+            <a:avLst/>
+          </a:prstGeom>
+          <a:noFill/>
+          <a:ln>
+            <a:noFill/>
+          </a:ln>
+        </p:spPr>
+        <p:txBody>
+          <a:bodyPr wrap="none" lIns="0" tIns="0" rIns="0" bIns="0" anchor="t">
             <a:normAutofit/>
           </a:bodyPr>
           <a:lstStyle/>

--- a/examples/showcase/decks/quarterly-review/q3-비즈니스-리뷰.pptx
+++ b/examples/showcase/decks/quarterly-review/q3-비즈니스-리뷰.pptx
@@ -5628,4 +5628,116 @@
     </a:fmtScheme>
   </a:themeElements>
 </a:theme>
+</file>
+
+<file path=ppt/theme/theme2.xml><?xml version="1.0" encoding="utf-8"?>
+<a:theme xmlns:a="http://schemas.openxmlformats.org/drawingml/2006/main" name="minimal">
+  <a:themeElements>
+    <a:clrScheme name="minimal">
+      <a:dk1>
+        <a:srgbClr val="1A1A1A"/>
+      </a:dk1>
+      <a:lt1>
+        <a:srgbClr val="FFFFFF"/>
+      </a:lt1>
+      <a:dk2>
+        <a:srgbClr val="6B7280"/>
+      </a:dk2>
+      <a:lt2>
+        <a:srgbClr val="F3F4F6"/>
+      </a:lt2>
+      <a:accent1>
+        <a:srgbClr val="0F65F9"/>
+      </a:accent1>
+      <a:accent2>
+        <a:srgbClr val="0E8174"/>
+      </a:accent2>
+      <a:accent3>
+        <a:srgbClr val="15803D"/>
+      </a:accent3>
+      <a:accent4>
+        <a:srgbClr val="B45309"/>
+      </a:accent4>
+      <a:accent5>
+        <a:srgbClr val="DC2626"/>
+      </a:accent5>
+      <a:accent6>
+        <a:srgbClr val="9333EA"/>
+      </a:accent6>
+      <a:hlink>
+        <a:srgbClr val="0F65F9"/>
+      </a:hlink>
+      <a:folHlink>
+        <a:srgbClr val="0F65F9"/>
+      </a:folHlink>
+    </a:clrScheme>
+    <a:fontScheme name="minimal">
+      <a:majorFont>
+        <a:latin typeface="Noto Sans"/>
+        <a:ea typeface="Noto Sans CJK KR"/>
+        <a:cs typeface=""/>
+      </a:majorFont>
+      <a:minorFont>
+        <a:latin typeface="Noto Sans"/>
+        <a:ea typeface="Noto Sans CJK KR"/>
+        <a:cs typeface=""/>
+      </a:minorFont>
+    </a:fontScheme>
+    <a:fmtScheme name="minimal">
+      <a:fillStyleLst>
+        <a:solidFill>
+          <a:schemeClr val="phClr"/>
+        </a:solidFill>
+        <a:solidFill>
+          <a:schemeClr val="phClr"/>
+        </a:solidFill>
+        <a:solidFill>
+          <a:schemeClr val="phClr"/>
+        </a:solidFill>
+      </a:fillStyleLst>
+      <a:lnStyleLst>
+        <a:ln w="9525" cap="flat" cmpd="sng" algn="ctr">
+          <a:solidFill>
+            <a:schemeClr val="phClr"/>
+          </a:solidFill>
+          <a:prstDash val="solid"/>
+        </a:ln>
+        <a:ln w="19050" cap="flat" cmpd="sng" algn="ctr">
+          <a:solidFill>
+            <a:schemeClr val="phClr"/>
+          </a:solidFill>
+          <a:prstDash val="solid"/>
+        </a:ln>
+        <a:ln w="28575" cap="flat" cmpd="sng" algn="ctr">
+          <a:solidFill>
+            <a:schemeClr val="phClr"/>
+          </a:solidFill>
+          <a:prstDash val="solid"/>
+        </a:ln>
+      </a:lnStyleLst>
+      <a:effectStyleLst>
+        <a:effectStyle>
+          <a:effectLst/>
+        </a:effectStyle>
+        <a:effectStyle>
+          <a:effectLst/>
+        </a:effectStyle>
+        <a:effectStyle>
+          <a:effectLst/>
+        </a:effectStyle>
+      </a:effectStyleLst>
+      <a:bgFillStyleLst>
+        <a:solidFill>
+          <a:schemeClr val="phClr"/>
+        </a:solidFill>
+        <a:solidFill>
+          <a:schemeClr val="phClr"/>
+        </a:solidFill>
+        <a:solidFill>
+          <a:schemeClr val="phClr"/>
+        </a:solidFill>
+      </a:bgFillStyleLst>
+    </a:fmtScheme>
+  </a:themeElements>
+</a:theme>
 </file>
--- a/examples/showcase/decks/quarterly-review/q3-비즈니스-리뷰.pptx
+++ b/examples/showcase/decks/quarterly-review/q3-비즈니스-리뷰.pptx
@@ -1596,7 +1596,7 @@
               </a:lnSpc>
             </a:pPr>
             <a:r>
-              <a:rPr sz="1350" b="1">
+              <a:rPr sz="1350" b="1" spc="135" cap="all">
                 <a:solidFill>
                   <a:schemeClr val="accent1"/>
                 </a:solidFill>
@@ -1806,7 +1806,7 @@
               </a:lnSpc>
             </a:pPr>
             <a:r>
-              <a:rPr sz="1350" b="1">
+              <a:rPr sz="1350" b="1" spc="135" cap="all">
                 <a:solidFill>
                   <a:schemeClr val="accent1"/>
                 </a:solidFill>
@@ -2016,7 +2016,7 @@
               </a:lnSpc>
             </a:pPr>
             <a:r>
-              <a:rPr sz="1350" b="1">
+              <a:rPr sz="1350" b="1" spc="135" cap="all">
                 <a:solidFill>
                   <a:schemeClr val="accent1"/>
                 </a:solidFill>
@@ -3802,7 +3802,7 @@
               </a:lnSpc>
             </a:pPr>
             <a:r>
-              <a:rPr sz="1350" b="1">
+              <a:rPr sz="1350" b="1" spc="135" cap="all">
                 <a:solidFill>
                   <a:schemeClr val="accent1"/>
                 </a:solidFill>
@@ -4625,7 +4625,7 @@
               </a:lnSpc>
             </a:pPr>
             <a:r>
-              <a:rPr sz="1350" b="1">
+              <a:rPr sz="1350" b="1" spc="135" cap="all">
                 <a:solidFill>
                   <a:schemeClr val="accent1"/>
                 </a:solidFill>
@@ -5086,7 +5086,7 @@
               </a:lnSpc>
             </a:pPr>
             <a:r>
-              <a:rPr sz="1350" b="1">
+              <a:rPr sz="1350" b="1" spc="135" cap="all">
                 <a:solidFill>
                   <a:schemeClr val="accent1"/>
                 </a:solidFill>
